--- a/Classes/SvcDev-05-Microservices.pptx
+++ b/Classes/SvcDev-05-Microservices.pptx
@@ -224,7 +224,7 @@
             <a:fld id="{2C5F02C1-A2C2-45D1-8D60-D454C04B5E27}" type="datetimeFigureOut">
               <a:rPr lang="es-CO" smtClean="0"/>
               <a:pPr/>
-              <a:t>14/03/2022</a:t>
+              <a:t>8/09/2023</a:t>
             </a:fld>
             <a:endParaRPr lang="es-CO" dirty="0"/>
           </a:p>
@@ -290,35 +290,35 @@
           <a:p>
             <a:pPr lvl="0"/>
             <a:r>
-              <a:rPr lang="en-US" smtClean="0"/>
+              <a:rPr lang="en-US"/>
               <a:t>Click to edit Master text styles</a:t>
             </a:r>
           </a:p>
           <a:p>
             <a:pPr lvl="1"/>
             <a:r>
-              <a:rPr lang="en-US" smtClean="0"/>
+              <a:rPr lang="en-US"/>
               <a:t>Second level</a:t>
             </a:r>
           </a:p>
           <a:p>
             <a:pPr lvl="2"/>
             <a:r>
-              <a:rPr lang="en-US" smtClean="0"/>
+              <a:rPr lang="en-US"/>
               <a:t>Third level</a:t>
             </a:r>
           </a:p>
           <a:p>
             <a:pPr lvl="3"/>
             <a:r>
-              <a:rPr lang="en-US" smtClean="0"/>
+              <a:rPr lang="en-US"/>
               <a:t>Fourth level</a:t>
             </a:r>
           </a:p>
           <a:p>
             <a:pPr lvl="4"/>
             <a:r>
-              <a:rPr lang="en-US" smtClean="0"/>
+              <a:rPr lang="en-US"/>
               <a:t>Fifth level</a:t>
             </a:r>
             <a:endParaRPr lang="es-CO"/>
@@ -386,7 +386,7 @@
             <a:fld id="{3461A6AF-5C91-4279-A2A9-5DA981759015}" type="slidenum">
               <a:rPr lang="es-CO" smtClean="0"/>
               <a:pPr/>
-              <a:t>‹#›</a:t>
+              <a:t>‹Nº›</a:t>
             </a:fld>
             <a:endParaRPr lang="es-CO" dirty="0"/>
           </a:p>
@@ -627,12 +627,12 @@
           <a:lstStyle/>
           <a:p>
             <a:r>
-              <a:rPr lang="es-CO" dirty="0" smtClean="0"/>
+              <a:rPr lang="es-CO" dirty="0"/>
               <a:t>https://www.ilimit.com/blog/arquitecturas-monoliticas-o-arquitectura-de-microservicios-ventajas-e-inconvenientes/</a:t>
             </a:r>
           </a:p>
           <a:p>
-            <a:endParaRPr lang="es-CO" dirty="0" smtClean="0"/>
+            <a:endParaRPr lang="es-CO" dirty="0"/>
           </a:p>
           <a:p>
             <a:pPr marL="171450" marR="0" lvl="0" indent="-171450" algn="l" defTabSz="914400" rtl="0" eaLnBrk="1" fontAlgn="auto" latinLnBrk="0" hangingPunct="1">
@@ -653,15 +653,15 @@
               <a:defRPr/>
             </a:pPr>
             <a:r>
-              <a:rPr lang="es-CO" b="1" dirty="0" err="1" smtClean="0"/>
+              <a:rPr lang="es-CO" b="1" dirty="0" err="1"/>
               <a:t>Cremiento</a:t>
             </a:r>
             <a:r>
-              <a:rPr lang="es-CO" b="1" dirty="0" smtClean="0"/>
+              <a:rPr lang="es-CO" b="1" dirty="0"/>
               <a:t>/Escalamiento: </a:t>
             </a:r>
             <a:r>
-              <a:rPr lang="es-CO" sz="1200" b="0" i="0" kern="1200" dirty="0" smtClean="0">
+              <a:rPr lang="es-CO" sz="1200" b="0" i="0" kern="1200" dirty="0">
                 <a:solidFill>
                   <a:schemeClr val="tx1"/>
                 </a:solidFill>
@@ -673,7 +673,7 @@
               <a:t>Cuando una </a:t>
             </a:r>
             <a:r>
-              <a:rPr lang="es-CO" sz="1200" b="1" i="0" kern="1200" dirty="0" smtClean="0">
+              <a:rPr lang="es-CO" sz="1200" b="1" i="0" kern="1200" dirty="0">
                 <a:solidFill>
                   <a:schemeClr val="tx1"/>
                 </a:solidFill>
@@ -685,7 +685,7 @@
               <a:t>aplicación monolítica tiene éxito y crece</a:t>
             </a:r>
             <a:r>
-              <a:rPr lang="es-CO" sz="1200" b="0" i="0" kern="1200" dirty="0" smtClean="0">
+              <a:rPr lang="es-CO" sz="1200" b="0" i="0" kern="1200" dirty="0">
                 <a:solidFill>
                   <a:schemeClr val="tx1"/>
                 </a:solidFill>
@@ -697,7 +697,7 @@
               <a:t>, necesitando ser escalada por necesitar más rendimiento o espacio. En estos casos se puede optar por crear la aplicación de </a:t>
             </a:r>
             <a:r>
-              <a:rPr lang="es-CO" sz="1200" b="0" i="0" kern="1200" dirty="0" err="1" smtClean="0">
+              <a:rPr lang="es-CO" sz="1200" b="0" i="0" kern="1200" dirty="0" err="1">
                 <a:solidFill>
                   <a:schemeClr val="tx1"/>
                 </a:solidFill>
@@ -709,7 +709,7 @@
               <a:t>microservicios</a:t>
             </a:r>
             <a:r>
-              <a:rPr lang="es-CO" sz="1200" b="0" i="0" kern="1200" dirty="0" smtClean="0">
+              <a:rPr lang="es-CO" sz="1200" b="0" i="0" kern="1200" dirty="0">
                 <a:solidFill>
                   <a:schemeClr val="tx1"/>
                 </a:solidFill>
@@ -740,11 +740,11 @@
               <a:defRPr/>
             </a:pPr>
             <a:r>
-              <a:rPr lang="es-CO" b="1" dirty="0" smtClean="0"/>
+              <a:rPr lang="es-CO" b="1" dirty="0"/>
               <a:t>Modularidad: </a:t>
             </a:r>
             <a:r>
-              <a:rPr lang="es-CO" sz="1200" b="0" i="0" kern="1200" dirty="0" smtClean="0">
+              <a:rPr lang="es-CO" sz="1200" b="0" i="0" kern="1200" dirty="0">
                 <a:solidFill>
                   <a:schemeClr val="tx1"/>
                 </a:solidFill>
@@ -756,7 +756,7 @@
               <a:t>Cuando el </a:t>
             </a:r>
             <a:r>
-              <a:rPr lang="es-CO" sz="1200" b="1" i="0" kern="1200" dirty="0" smtClean="0">
+              <a:rPr lang="es-CO" sz="1200" b="1" i="0" kern="1200" dirty="0">
                 <a:solidFill>
                   <a:schemeClr val="tx1"/>
                 </a:solidFill>
@@ -768,7 +768,7 @@
               <a:t>enfoque inicial</a:t>
             </a:r>
             <a:r>
-              <a:rPr lang="es-CO" sz="1200" b="0" i="0" kern="1200" dirty="0" smtClean="0">
+              <a:rPr lang="es-CO" sz="1200" b="0" i="0" kern="1200" dirty="0">
                 <a:solidFill>
                   <a:schemeClr val="tx1"/>
                 </a:solidFill>
@@ -780,7 +780,7 @@
               <a:t> de la aplicación tenga un mejor desarrollo con una arquitectura de </a:t>
             </a:r>
             <a:r>
-              <a:rPr lang="es-CO" sz="1200" b="0" i="0" kern="1200" dirty="0" err="1" smtClean="0">
+              <a:rPr lang="es-CO" sz="1200" b="0" i="0" kern="1200" dirty="0" err="1">
                 <a:solidFill>
                   <a:schemeClr val="tx1"/>
                 </a:solidFill>
@@ -792,7 +792,7 @@
               <a:t>microservicios</a:t>
             </a:r>
             <a:r>
-              <a:rPr lang="es-CO" sz="1200" b="0" i="0" kern="1200" dirty="0" smtClean="0">
+              <a:rPr lang="es-CO" sz="1200" b="0" i="0" kern="1200" dirty="0">
                 <a:solidFill>
                   <a:schemeClr val="tx1"/>
                 </a:solidFill>
@@ -804,7 +804,7 @@
               <a:t> (si se prevé que la aplicación tenga un gran volumen de tráfico o usuarios, se dispone de un equipo de desarrolladores, se van a utilizar herramientas avanzadas, la modularidad es un aspecto importante, se necesita una entrega continua, y otros enfoques en </a:t>
             </a:r>
             <a:r>
-              <a:rPr lang="es-CO" sz="1200" b="0" i="0" kern="1200" dirty="0" err="1" smtClean="0">
+              <a:rPr lang="es-CO" sz="1200" b="0" i="0" kern="1200" dirty="0" err="1">
                 <a:solidFill>
                   <a:schemeClr val="tx1"/>
                 </a:solidFill>
@@ -816,7 +816,7 @@
               <a:t>microservicios</a:t>
             </a:r>
             <a:r>
-              <a:rPr lang="es-CO" sz="1200" b="0" i="0" kern="1200" dirty="0" smtClean="0">
+              <a:rPr lang="es-CO" sz="1200" b="0" i="0" kern="1200" dirty="0">
                 <a:solidFill>
                   <a:schemeClr val="tx1"/>
                 </a:solidFill>
@@ -833,7 +833,7 @@
               <a:buFont typeface="Arial" panose="020B0604020202020204" pitchFamily="34" charset="0"/>
               <a:buChar char="•"/>
             </a:pPr>
-            <a:endParaRPr lang="es-CO" b="1" dirty="0" smtClean="0"/>
+            <a:endParaRPr lang="es-CO" b="1" dirty="0"/>
           </a:p>
           <a:p>
             <a:pPr marL="171450" indent="-171450">
@@ -923,23 +923,23 @@
         <p:spPr/>
         <p:txBody>
           <a:bodyPr>
-            <a:normAutofit lnSpcReduction="10000"/>
+            <a:normAutofit fontScale="85000" lnSpcReduction="20000"/>
           </a:bodyPr>
           <a:lstStyle/>
           <a:p>
             <a:r>
-              <a:rPr lang="es-CO" dirty="0" smtClean="0"/>
+              <a:rPr lang="es-CO" dirty="0"/>
               <a:t>https://docs.microsoft.com/es-es/azure/architecture/microservices/migrate-monolith</a:t>
             </a:r>
           </a:p>
           <a:p>
             <a:r>
-              <a:rPr lang="es-CO" dirty="0" smtClean="0"/>
+              <a:rPr lang="es-CO" dirty="0"/>
               <a:t>https://cursosdescargar.com/microservicios-como-migrar-de-monolitos-a-microservicios/</a:t>
             </a:r>
           </a:p>
           <a:p>
-            <a:endParaRPr lang="es-CO" dirty="0" smtClean="0"/>
+            <a:endParaRPr lang="es-CO" dirty="0"/>
           </a:p>
           <a:p>
             <a:pPr marL="171450" indent="-171450">
@@ -947,26 +947,25 @@
               <a:buChar char="•"/>
             </a:pPr>
             <a:r>
-              <a:rPr lang="es-CO" b="1" dirty="0" smtClean="0"/>
+              <a:rPr lang="es-CO" b="1" dirty="0"/>
               <a:t>Identifique: </a:t>
             </a:r>
             <a:r>
-              <a:rPr lang="es-CO" dirty="0" smtClean="0"/>
+              <a:rPr lang="es-CO" dirty="0"/>
               <a:t>Identificar las lógica</a:t>
             </a:r>
             <a:r>
-              <a:rPr lang="es-CO" baseline="0" dirty="0" smtClean="0"/>
+              <a:rPr lang="es-CO" baseline="0" dirty="0"/>
               <a:t> y los datos relacionados con al nuevo servicio. </a:t>
             </a:r>
             <a:r>
-              <a:rPr lang="es-CO" baseline="0" dirty="0" err="1" smtClean="0"/>
+              <a:rPr lang="es-CO" baseline="0" dirty="0" err="1"/>
               <a:t>Basandose</a:t>
             </a:r>
             <a:r>
-              <a:rPr lang="es-CO" baseline="0" dirty="0" smtClean="0"/>
+              <a:rPr lang="es-CO" baseline="0" dirty="0"/>
               <a:t> en el Dominio de la aplicación, primero debe identificar los elementos del negocio que intervienen en determinada funcionalidad, tablas, campos componentes, etc.  (Productos y Precios)</a:t>
             </a:r>
-            <a:endParaRPr lang="es-CO" baseline="0" dirty="0" smtClean="0"/>
           </a:p>
           <a:p>
             <a:pPr marL="171450" indent="-171450">
@@ -974,35 +973,35 @@
               <a:buChar char="•"/>
             </a:pPr>
             <a:r>
-              <a:rPr lang="es-CO" b="1" baseline="0" dirty="0" smtClean="0"/>
+              <a:rPr lang="es-CO" b="1" baseline="0" dirty="0"/>
               <a:t>Agrupe y separe:  </a:t>
             </a:r>
             <a:r>
-              <a:rPr lang="es-CO" b="0" baseline="0" dirty="0" smtClean="0"/>
+              <a:rPr lang="es-CO" b="0" baseline="0" dirty="0"/>
               <a:t>Crear una separación lógica del nuevo </a:t>
             </a:r>
             <a:r>
-              <a:rPr lang="es-CO" b="0" baseline="0" dirty="0" err="1" smtClean="0"/>
+              <a:rPr lang="es-CO" b="0" baseline="0" dirty="0" err="1"/>
               <a:t>servicio,pero</a:t>
             </a:r>
             <a:r>
-              <a:rPr lang="es-CO" b="0" baseline="0" dirty="0" smtClean="0"/>
+              <a:rPr lang="es-CO" b="0" baseline="0" dirty="0"/>
               <a:t> dentro del monolito. El objetivo es aislar los datos y los métodos de cada </a:t>
             </a:r>
             <a:r>
-              <a:rPr lang="es-CO" b="0" baseline="0" dirty="0" err="1" smtClean="0"/>
+              <a:rPr lang="es-CO" b="0" baseline="0" dirty="0" err="1"/>
               <a:t>fundionalidad</a:t>
             </a:r>
             <a:r>
-              <a:rPr lang="es-CO" b="0" baseline="0" dirty="0" smtClean="0"/>
+              <a:rPr lang="es-CO" b="0" baseline="0" dirty="0"/>
               <a:t> antes de sacarlo a un servicio, para poder establecer los limites de cada funcionalidad. </a:t>
             </a:r>
             <a:r>
-              <a:rPr lang="es-CO" b="0" baseline="0" dirty="0" err="1" smtClean="0"/>
+              <a:rPr lang="es-CO" b="0" baseline="0" dirty="0" err="1"/>
               <a:t>Especificamente</a:t>
             </a:r>
             <a:r>
-              <a:rPr lang="es-CO" b="0" baseline="0" dirty="0" smtClean="0"/>
+              <a:rPr lang="es-CO" b="0" baseline="0" dirty="0"/>
               <a:t> es crear clases separadas dentro del monolito que ofrezcan métodos relacionados a su funcionalidad en especifico, con la condición principal que si un método de otra clase necesita datos de otra clase, solo lo puede hacer mediante el consumo de servicios y no acceder directamente.</a:t>
             </a:r>
           </a:p>
@@ -1012,19 +1011,19 @@
               <a:buChar char="•"/>
             </a:pPr>
             <a:r>
-              <a:rPr lang="es-CO" b="1" baseline="0" dirty="0" smtClean="0"/>
+              <a:rPr lang="es-CO" b="1" baseline="0" dirty="0"/>
               <a:t>Nueva Data: </a:t>
             </a:r>
             <a:r>
-              <a:rPr lang="es-CO" b="0" baseline="0" dirty="0" smtClean="0"/>
+              <a:rPr lang="es-CO" b="0" baseline="0" dirty="0"/>
               <a:t> Crear nuevas tablas para el nuevo servicio, en el monolito. </a:t>
             </a:r>
             <a:r>
-              <a:rPr lang="es-CO" b="0" baseline="0" dirty="0" err="1" smtClean="0"/>
+              <a:rPr lang="es-CO" b="0" baseline="0" dirty="0" err="1"/>
               <a:t>Especificamente</a:t>
             </a:r>
             <a:r>
-              <a:rPr lang="es-CO" b="0" baseline="0" dirty="0" smtClean="0"/>
+              <a:rPr lang="es-CO" b="0" baseline="0" dirty="0"/>
               <a:t> es migrar datos de una tabla a dos tablas relacionadas. Para que puedan ser accedidos por el nuevo servicio.</a:t>
             </a:r>
           </a:p>
@@ -1034,11 +1033,11 @@
               <a:buChar char="•"/>
             </a:pPr>
             <a:r>
-              <a:rPr lang="es-CO" b="1" baseline="0" dirty="0" smtClean="0"/>
+              <a:rPr lang="es-CO" b="1" baseline="0" dirty="0"/>
               <a:t>Nuevo Servicio: </a:t>
             </a:r>
             <a:r>
-              <a:rPr lang="es-CO" b="0" baseline="0" dirty="0" smtClean="0"/>
+              <a:rPr lang="es-CO" b="0" baseline="0" dirty="0"/>
               <a:t>Crear un nuevo servicio que apunte a tablas dentro de una base de datos monolítica.</a:t>
             </a:r>
           </a:p>
@@ -1048,11 +1047,11 @@
               <a:buChar char="•"/>
             </a:pPr>
             <a:r>
-              <a:rPr lang="es-CO" b="1" baseline="0" dirty="0" smtClean="0"/>
+              <a:rPr lang="es-CO" b="1" baseline="0" dirty="0"/>
               <a:t>Socializar: </a:t>
             </a:r>
             <a:r>
-              <a:rPr lang="es-CO" b="0" baseline="0" dirty="0" smtClean="0"/>
+              <a:rPr lang="es-CO" b="0" baseline="0" dirty="0"/>
               <a:t>Indicar a los clientes el nuevo servicio. La idea es hacer que quienes utilicen la funcionalidad determinada ahora lo hagan mediante el uso del nuevo servicio y así evitar tener dos llamados, uno de la forma nueva y otro por la forma anterior. Aquí es importante que los clientes se migren gradualmente y solo hasta que esto se logre podemos hacer el siguiente paso.</a:t>
             </a:r>
           </a:p>
@@ -1062,11 +1061,11 @@
               <a:buChar char="•"/>
             </a:pPr>
             <a:r>
-              <a:rPr lang="es-CO" b="1" baseline="0" dirty="0" smtClean="0"/>
+              <a:rPr lang="es-CO" b="1" baseline="0" dirty="0"/>
               <a:t>Nueva Base de datos: </a:t>
             </a:r>
             <a:r>
-              <a:rPr lang="es-CO" b="0" baseline="0" dirty="0" smtClean="0"/>
+              <a:rPr lang="es-CO" b="0" baseline="0" dirty="0"/>
               <a:t> Crear la base de datos para el nuevo servicio. En este punto es pasar la nueva tabla a una nueva base de datos aislada de las otras tablas del monolito. Es Importante conservar la misma estructura sin alterar ni campos , ni tipos ni nombres de columnas.</a:t>
             </a:r>
           </a:p>
@@ -1076,11 +1075,11 @@
               <a:buChar char="•"/>
             </a:pPr>
             <a:r>
-              <a:rPr lang="es-CO" b="1" baseline="0" dirty="0" smtClean="0"/>
+              <a:rPr lang="es-CO" b="1" baseline="0" dirty="0"/>
               <a:t>Sincronizar: </a:t>
             </a:r>
             <a:r>
-              <a:rPr lang="es-CO" b="0" baseline="0" dirty="0" smtClean="0"/>
+              <a:rPr lang="es-CO" b="0" baseline="0" dirty="0"/>
               <a:t>Sincronizar datos del monolito con la nueva base de datos. </a:t>
             </a:r>
           </a:p>
@@ -1090,15 +1089,15 @@
               <a:buChar char="•"/>
             </a:pPr>
             <a:r>
-              <a:rPr lang="es-CO" b="1" baseline="0" dirty="0" err="1" smtClean="0"/>
+              <a:rPr lang="es-CO" b="1" baseline="0" dirty="0" err="1"/>
               <a:t>Redireccionar</a:t>
             </a:r>
             <a:r>
-              <a:rPr lang="es-CO" b="1" baseline="0" dirty="0" smtClean="0"/>
+              <a:rPr lang="es-CO" b="1" baseline="0" dirty="0"/>
               <a:t>: </a:t>
             </a:r>
             <a:r>
-              <a:rPr lang="es-CO" b="0" baseline="0" dirty="0" smtClean="0"/>
+              <a:rPr lang="es-CO" b="0" baseline="0" dirty="0"/>
               <a:t>Apuntar el nuevo servicio a la nueva base de datos.</a:t>
             </a:r>
           </a:p>
@@ -1108,14 +1107,14 @@
               <a:buChar char="•"/>
             </a:pPr>
             <a:r>
-              <a:rPr lang="es-CO" b="1" baseline="0" dirty="0" smtClean="0"/>
+              <a:rPr lang="es-CO" b="1" baseline="0" dirty="0"/>
               <a:t>Limpiar:</a:t>
             </a:r>
             <a:r>
-              <a:rPr lang="es-CO" b="0" baseline="0" dirty="0" smtClean="0"/>
+              <a:rPr lang="es-CO" b="0" baseline="0" dirty="0"/>
               <a:t> Eliminar la lógica y el esquema del monolito relacionados con el nuevo servicio.</a:t>
             </a:r>
-            <a:endParaRPr lang="es-CO" b="1" baseline="0" dirty="0" smtClean="0"/>
+            <a:endParaRPr lang="es-CO" b="1" baseline="0" dirty="0"/>
           </a:p>
           <a:p>
             <a:pPr marL="171450" indent="-171450">
@@ -1123,21 +1122,21 @@
               <a:buChar char="•"/>
             </a:pPr>
             <a:r>
-              <a:rPr lang="es-CO" b="1" baseline="0" dirty="0" smtClean="0"/>
+              <a:rPr lang="es-CO" b="1" baseline="0" dirty="0"/>
               <a:t>Pruebe y Automatice: </a:t>
             </a:r>
             <a:r>
-              <a:rPr lang="es-CO" b="0" baseline="0" dirty="0" smtClean="0"/>
+              <a:rPr lang="es-CO" b="0" baseline="0" dirty="0"/>
               <a:t>Realice pruebas unitarias del servicio que permitan saber que cambia y que se impacta con los cambios, de esta forma garantiza la integridad de la aplicación, de igual forma se hace muy importante que estas pruebas se realicen de forma automática para facilitar su ejecución y prueba dentro del mismo proceso de migración y para tenerlas después como pruebas de integración del mismo servicio.</a:t>
             </a:r>
-            <a:endParaRPr lang="es-CO" baseline="0" dirty="0" smtClean="0"/>
+            <a:endParaRPr lang="es-CO" baseline="0" dirty="0"/>
           </a:p>
           <a:p>
             <a:pPr marL="171450" indent="-171450">
               <a:buFont typeface="Arial" panose="020B0604020202020204" pitchFamily="34" charset="0"/>
               <a:buChar char="•"/>
             </a:pPr>
-            <a:endParaRPr lang="es-CO" baseline="0" dirty="0" smtClean="0"/>
+            <a:endParaRPr lang="es-CO" baseline="0" dirty="0"/>
           </a:p>
           <a:p>
             <a:pPr marL="171450" indent="-171450">
@@ -1234,11 +1233,11 @@
               <a:buChar char="•"/>
             </a:pPr>
             <a:r>
-              <a:rPr lang="es-CO" dirty="0" smtClean="0"/>
+              <a:rPr lang="es-CO" dirty="0"/>
               <a:t>En los</a:t>
             </a:r>
             <a:r>
-              <a:rPr lang="es-CO" baseline="0" dirty="0" smtClean="0"/>
+              <a:rPr lang="es-CO" baseline="0" dirty="0"/>
               <a:t> noventas los programas se basaban en programación estructurada , mas con el uso de funciones y reutilización de librerías, por eso el código se construía , en gran manera, copiando y pegando funciones en donde se necesitaban. Esto se asimila a una bola de espaguetis donde el código esta todo revuelto y no se tiene claridad de que usa a quien.</a:t>
             </a:r>
           </a:p>
@@ -1248,24 +1247,16 @@
               <a:buChar char="•"/>
             </a:pPr>
             <a:r>
-              <a:rPr lang="es-CO" baseline="0" dirty="0" smtClean="0"/>
+              <a:rPr lang="es-CO" baseline="0" dirty="0"/>
               <a:t>Cerca a la década de los 2 mil, se populariza la separación de responsabilidades y se crean las capas, como una forma de dividir y separar la lógica, pudiendo reutilizarse componentes. La separación por capas se asemeja a la </a:t>
             </a:r>
             <a:r>
-              <a:rPr lang="es-CO" baseline="0" dirty="0" err="1" smtClean="0"/>
+              <a:rPr lang="es-CO" baseline="0" dirty="0" err="1"/>
               <a:t>Lasagña</a:t>
             </a:r>
             <a:r>
-              <a:rPr lang="es-CO" baseline="0" dirty="0" smtClean="0"/>
-              <a:t>, ya </a:t>
-            </a:r>
-            <a:r>
-              <a:rPr lang="es-CO" baseline="0" dirty="0" smtClean="0"/>
-              <a:t>que </a:t>
-            </a:r>
-            <a:r>
-              <a:rPr lang="es-CO" baseline="0" dirty="0" smtClean="0"/>
-              <a:t>cada especialización crea una nueva capa que es montada sobre la otra y que puede reutilizarse, creando de esta manera lo que en algunos casos conocemos como Monolitos. </a:t>
+              <a:rPr lang="es-CO" baseline="0" dirty="0"/>
+              <a:t>, ya que cada especialización crea una nueva capa que es montada sobre la otra y que puede reutilizarse, creando de esta manera lo que en algunos casos conocemos como Monolitos. </a:t>
             </a:r>
           </a:p>
           <a:p>
@@ -1274,15 +1265,15 @@
               <a:buChar char="•"/>
             </a:pPr>
             <a:r>
-              <a:rPr lang="es-CO" baseline="0" dirty="0" smtClean="0"/>
+              <a:rPr lang="es-CO" baseline="0" dirty="0"/>
               <a:t>A partir de la década del 2010, se comienza a ver la necesidad de simplificar mucho mas los componentes y especializarlos y esto da pie a la creación de lo que hoy conocemos como </a:t>
             </a:r>
             <a:r>
-              <a:rPr lang="es-CO" baseline="0" dirty="0" err="1" smtClean="0"/>
+              <a:rPr lang="es-CO" baseline="0" dirty="0" err="1"/>
               <a:t>microservicios</a:t>
             </a:r>
             <a:r>
-              <a:rPr lang="es-CO" baseline="0" dirty="0" smtClean="0"/>
+              <a:rPr lang="es-CO" baseline="0" dirty="0"/>
               <a:t>, asemejándose mucho a los raviolis, donde cada elemento tiene lo necesario para tener su funcionamiento.</a:t>
             </a:r>
             <a:endParaRPr lang="es-CO" dirty="0"/>
@@ -1371,12 +1362,12 @@
           <a:lstStyle/>
           <a:p>
             <a:r>
-              <a:rPr lang="es-CO" dirty="0" smtClean="0"/>
+              <a:rPr lang="es-CO" dirty="0"/>
               <a:t>https://aws.amazon.com/es/microservices/</a:t>
             </a:r>
           </a:p>
           <a:p>
-            <a:endParaRPr lang="es-CO" dirty="0" smtClean="0"/>
+            <a:endParaRPr lang="es-CO" dirty="0"/>
           </a:p>
           <a:p>
             <a:pPr marL="0" marR="0" lvl="0" indent="0" algn="l" defTabSz="914400" rtl="0" eaLnBrk="1" fontAlgn="auto" latinLnBrk="0" hangingPunct="1">
@@ -1397,12 +1388,12 @@
               <a:defRPr/>
             </a:pPr>
             <a:r>
-              <a:rPr lang="es-CO" dirty="0" smtClean="0"/>
+              <a:rPr lang="es-CO" dirty="0"/>
               <a:t>“Los propietarios de estos servicios son equipos pequeños independientes.”</a:t>
             </a:r>
           </a:p>
           <a:p>
-            <a:endParaRPr lang="es-CO" dirty="0" smtClean="0"/>
+            <a:endParaRPr lang="es-CO" dirty="0"/>
           </a:p>
           <a:p>
             <a:pPr marL="0" marR="0" lvl="0" indent="0" algn="l" defTabSz="914400" rtl="0" eaLnBrk="1" fontAlgn="auto" latinLnBrk="0" hangingPunct="1">
@@ -1423,20 +1414,20 @@
               <a:defRPr/>
             </a:pPr>
             <a:r>
-              <a:rPr lang="es-CO" dirty="0" smtClean="0"/>
+              <a:rPr lang="es-CO" dirty="0"/>
               <a:t>Las arquitecturas de </a:t>
             </a:r>
             <a:r>
-              <a:rPr lang="es-CO" dirty="0" err="1" smtClean="0"/>
+              <a:rPr lang="es-CO" dirty="0" err="1"/>
               <a:t>microservicios</a:t>
             </a:r>
             <a:r>
-              <a:rPr lang="es-CO" dirty="0" smtClean="0"/>
+              <a:rPr lang="es-CO" dirty="0"/>
               <a:t> hacen que las aplicaciones sean más fáciles de escalar y más rápidas de desarrollar. Esto permite la innovación y acelera el tiempo de comercialización de las nuevas características.</a:t>
             </a:r>
           </a:p>
           <a:p>
-            <a:endParaRPr lang="es-CO" dirty="0" smtClean="0"/>
+            <a:endParaRPr lang="es-CO" dirty="0"/>
           </a:p>
           <a:p>
             <a:endParaRPr lang="es-CO" dirty="0"/>
@@ -1525,24 +1516,24 @@
           <a:lstStyle/>
           <a:p>
             <a:r>
-              <a:rPr lang="es-CO" dirty="0" smtClean="0"/>
+              <a:rPr lang="es-CO" dirty="0"/>
               <a:t>https://aws.amazon.com/es/microservices</a:t>
             </a:r>
           </a:p>
           <a:p>
             <a:r>
-              <a:rPr lang="es-CO" dirty="0" smtClean="0"/>
+              <a:rPr lang="es-CO" dirty="0"/>
               <a:t>https://www.incentro.com/es-ES/blog/que-son-microservicios</a:t>
             </a:r>
           </a:p>
           <a:p>
             <a:r>
-              <a:rPr lang="es-CO" dirty="0" smtClean="0"/>
+              <a:rPr lang="es-CO" dirty="0"/>
               <a:t>https://www.youtube.com/watch?v=DgVjEo3OGBI/</a:t>
             </a:r>
           </a:p>
           <a:p>
-            <a:endParaRPr lang="es-CO" dirty="0" smtClean="0"/>
+            <a:endParaRPr lang="es-CO" dirty="0"/>
           </a:p>
           <a:p>
             <a:pPr marL="171450" indent="-171450">
@@ -1550,7 +1541,7 @@
               <a:buChar char="•"/>
             </a:pPr>
             <a:r>
-              <a:rPr lang="es-CO" dirty="0" smtClean="0"/>
+              <a:rPr lang="es-CO" dirty="0"/>
               <a:t>Pequeños o especializados en el negocio. (Hacen una sola cosa y la hacen bien)</a:t>
             </a:r>
           </a:p>
@@ -1560,11 +1551,11 @@
               <a:buChar char="•"/>
             </a:pPr>
             <a:r>
-              <a:rPr lang="es-CO" dirty="0" smtClean="0"/>
+              <a:rPr lang="es-CO" dirty="0"/>
               <a:t>Autónomos, No dependen</a:t>
             </a:r>
             <a:r>
-              <a:rPr lang="es-CO" baseline="0" dirty="0" smtClean="0"/>
+              <a:rPr lang="es-CO" baseline="0" dirty="0"/>
               <a:t> de otros, cualquier comunicación la hacen mediante llamados a otros API de otros servicios </a:t>
             </a:r>
           </a:p>
@@ -1574,7 +1565,7 @@
               <a:buChar char="•"/>
             </a:pPr>
             <a:r>
-              <a:rPr lang="es-CO" baseline="0" dirty="0" smtClean="0"/>
+              <a:rPr lang="es-CO" baseline="0" dirty="0"/>
               <a:t>Su despliegue o escalamiento se hace de forma independiente sin afectar a otros</a:t>
             </a:r>
           </a:p>
@@ -1583,14 +1574,14 @@
               <a:buFont typeface="Arial" panose="020B0604020202020204" pitchFamily="34" charset="0"/>
               <a:buChar char="•"/>
             </a:pPr>
-            <a:endParaRPr lang="es-CO" baseline="0" dirty="0" smtClean="0"/>
+            <a:endParaRPr lang="es-CO" baseline="0" dirty="0"/>
           </a:p>
           <a:p>
             <a:pPr marL="171450" indent="-171450">
               <a:buFont typeface="Arial" panose="020B0604020202020204" pitchFamily="34" charset="0"/>
               <a:buChar char="•"/>
             </a:pPr>
-            <a:endParaRPr lang="es-CO" dirty="0" smtClean="0"/>
+            <a:endParaRPr lang="es-CO" dirty="0"/>
           </a:p>
           <a:p>
             <a:pPr marL="171450" indent="-171450">
@@ -1687,10 +1678,9 @@
               <a:buNone/>
             </a:pPr>
             <a:r>
-              <a:rPr lang="es-CO" dirty="0" smtClean="0"/>
+              <a:rPr lang="es-CO" dirty="0"/>
               <a:t>https://aws.amazon.com/es/microservices/</a:t>
             </a:r>
-            <a:endParaRPr lang="es-CO" dirty="0"/>
           </a:p>
         </p:txBody>
       </p:sp>
@@ -1776,22 +1766,21 @@
           <a:lstStyle/>
           <a:p>
             <a:r>
-              <a:rPr lang="es-CO" dirty="0" smtClean="0"/>
+              <a:rPr lang="es-CO" dirty="0"/>
               <a:t>https://ealmeida.blogspot.com/2019/10/aplicacion-monolitica-o-distribuida.html</a:t>
             </a:r>
           </a:p>
           <a:p>
             <a:r>
-              <a:rPr lang="es-CO" dirty="0" smtClean="0"/>
+              <a:rPr lang="es-CO" dirty="0"/>
               <a:t>https://programmerclick.com/article/5232896264/</a:t>
             </a:r>
           </a:p>
           <a:p>
             <a:r>
-              <a:rPr lang="es-CO" dirty="0" smtClean="0"/>
+              <a:rPr lang="es-CO" dirty="0"/>
               <a:t>https://www.ilimit.com/blog/arquitecturas-monoliticas-o-arquitectura-de-microservicios-ventajas-e-inconvenientes/</a:t>
             </a:r>
-            <a:endParaRPr lang="es-CO" dirty="0"/>
           </a:p>
         </p:txBody>
       </p:sp>
@@ -1896,7 +1885,7 @@
               <a:defRPr/>
             </a:pPr>
             <a:r>
-              <a:rPr lang="es-CO" sz="1200" b="1" dirty="0" smtClean="0"/>
+              <a:rPr lang="es-CO" sz="1200" b="1" dirty="0"/>
               <a:t>Ventajas</a:t>
             </a:r>
           </a:p>
@@ -1919,19 +1908,19 @@
               <a:defRPr/>
             </a:pPr>
             <a:r>
-              <a:rPr lang="es-CO" sz="1200" b="1" dirty="0" smtClean="0"/>
+              <a:rPr lang="es-CO" sz="1200" b="1" dirty="0"/>
               <a:t>Fácil de desarrollar: </a:t>
             </a:r>
             <a:r>
-              <a:rPr lang="es-CO" sz="1200" dirty="0" smtClean="0"/>
+              <a:rPr lang="es-CO" sz="1200" dirty="0"/>
               <a:t>Los programas son fáciles de desarrollar.</a:t>
             </a:r>
             <a:r>
-              <a:rPr lang="es-CO" sz="1200" baseline="0" dirty="0" smtClean="0"/>
+              <a:rPr lang="es-CO" sz="1200" baseline="0" dirty="0"/>
               <a:t> </a:t>
             </a:r>
             <a:r>
-              <a:rPr lang="es-CO" sz="1200" b="0" i="0" kern="1200" dirty="0" smtClean="0">
+              <a:rPr lang="es-CO" sz="1200" b="0" i="0" kern="1200" dirty="0">
                 <a:solidFill>
                   <a:schemeClr val="tx1"/>
                 </a:solidFill>
@@ -1943,7 +1932,7 @@
               <a:t>No hay que pensar demasiado donde desarrollo una nueva funcionalidad</a:t>
             </a:r>
             <a:r>
-              <a:rPr lang="es-CO" sz="1200" b="0" i="0" kern="1200" baseline="0" dirty="0" smtClean="0">
+              <a:rPr lang="es-CO" sz="1200" b="0" i="0" kern="1200" baseline="0" dirty="0">
                 <a:solidFill>
                   <a:schemeClr val="tx1"/>
                 </a:solidFill>
@@ -1974,7 +1963,7 @@
               <a:defRPr/>
             </a:pPr>
             <a:r>
-              <a:rPr lang="es-CO" sz="1200" b="1" i="0" kern="1200" baseline="0" dirty="0" smtClean="0">
+              <a:rPr lang="es-CO" sz="1200" b="1" i="0" kern="1200" baseline="0" dirty="0">
                 <a:solidFill>
                   <a:schemeClr val="tx1"/>
                 </a:solidFill>
@@ -1986,7 +1975,7 @@
               <a:t>Fácil despliegue e instalación</a:t>
             </a:r>
             <a:r>
-              <a:rPr lang="es-CO" sz="1200" b="0" i="0" kern="1200" baseline="0" dirty="0" smtClean="0">
+              <a:rPr lang="es-CO" sz="1200" b="0" i="0" kern="1200" baseline="0" dirty="0">
                 <a:solidFill>
                   <a:schemeClr val="tx1"/>
                 </a:solidFill>
@@ -1998,7 +1987,7 @@
               <a:t>: </a:t>
             </a:r>
             <a:r>
-              <a:rPr lang="es-CO" sz="1200" dirty="0" smtClean="0"/>
+              <a:rPr lang="es-CO" sz="1200" dirty="0"/>
               <a:t>El despliegue y la ejecución de software son sencillos, pues solo se instala una misma aplicación.</a:t>
             </a:r>
           </a:p>
@@ -2021,11 +2010,11 @@
               <a:defRPr/>
             </a:pPr>
             <a:r>
-              <a:rPr lang="es-CO" sz="1200" b="1" dirty="0" smtClean="0"/>
+              <a:rPr lang="es-CO" sz="1200" b="1" dirty="0"/>
               <a:t>Sencilla de Escalar: </a:t>
             </a:r>
             <a:r>
-              <a:rPr lang="es-CO" sz="1200" b="0" i="0" kern="1200" dirty="0" smtClean="0">
+              <a:rPr lang="es-CO" sz="1200" b="0" i="0" kern="1200" dirty="0">
                 <a:solidFill>
                   <a:schemeClr val="tx1"/>
                 </a:solidFill>
@@ -2056,13 +2045,13 @@
               <a:defRPr/>
             </a:pPr>
             <a:r>
-              <a:rPr lang="es-CO" b="1" dirty="0" smtClean="0">
+              <a:rPr lang="es-CO" b="1" dirty="0">
                 <a:effectLst/>
               </a:rPr>
               <a:t>Fácil de monitorear: </a:t>
             </a:r>
             <a:r>
-              <a:rPr lang="es-CO" sz="1200" b="0" i="0" kern="1200" dirty="0" smtClean="0">
+              <a:rPr lang="es-CO" sz="1200" b="0" i="0" kern="1200" dirty="0">
                 <a:solidFill>
                   <a:schemeClr val="tx1"/>
                 </a:solidFill>
@@ -2093,19 +2082,19 @@
               <a:defRPr/>
             </a:pPr>
             <a:r>
-              <a:rPr lang="es-CO" b="1" dirty="0" smtClean="0">
+              <a:rPr lang="es-CO" b="1" dirty="0">
                 <a:effectLst/>
               </a:rPr>
               <a:t>Testeo funcional es mas fácil:</a:t>
             </a:r>
             <a:r>
-              <a:rPr lang="es-CO" b="1" baseline="0" dirty="0" smtClean="0">
+              <a:rPr lang="es-CO" b="1" baseline="0" dirty="0">
                 <a:effectLst/>
               </a:rPr>
               <a:t> </a:t>
             </a:r>
             <a:r>
-              <a:rPr lang="es-CO" sz="1200" b="0" i="0" kern="1200" dirty="0" smtClean="0">
+              <a:rPr lang="es-CO" sz="1200" b="0" i="0" kern="1200" dirty="0">
                 <a:solidFill>
                   <a:schemeClr val="tx1"/>
                 </a:solidFill>
@@ -2116,7 +2105,7 @@
               </a:rPr>
               <a:t>Como todo esta concentrado en una aplicación, si la pruebo, ya pruebo que todo funciona bien.</a:t>
             </a:r>
-            <a:endParaRPr lang="es-CO" sz="1200" b="1" i="0" kern="1200" dirty="0" smtClean="0">
+            <a:endParaRPr lang="es-CO" sz="1200" b="1" i="0" kern="1200" dirty="0">
               <a:solidFill>
                 <a:schemeClr val="tx1"/>
               </a:solidFill>
@@ -2145,15 +2134,15 @@
               <a:defRPr/>
             </a:pPr>
             <a:r>
-              <a:rPr lang="es-CO" sz="1200" b="1" dirty="0" smtClean="0"/>
+              <a:rPr lang="es-CO" sz="1200" b="1" dirty="0"/>
               <a:t>Bajo costo de desarrollo: </a:t>
             </a:r>
             <a:r>
-              <a:rPr lang="es-CO" sz="1200" dirty="0" smtClean="0"/>
+              <a:rPr lang="es-CO" sz="1200" dirty="0"/>
               <a:t>El costo de desarrollo es bajo en comparación con otras arquitecturas, pues un solo programador</a:t>
             </a:r>
             <a:r>
-              <a:rPr lang="es-CO" sz="1200" baseline="0" dirty="0" smtClean="0"/>
+              <a:rPr lang="es-CO" sz="1200" baseline="0" dirty="0"/>
               <a:t> puede hacer todo un flujo desde la UI hasta la Base de datos.</a:t>
             </a:r>
           </a:p>
@@ -2176,11 +2165,11 @@
               <a:defRPr/>
             </a:pPr>
             <a:r>
-              <a:rPr lang="es-CO" sz="1200" b="1" baseline="0" dirty="0" smtClean="0"/>
+              <a:rPr lang="es-CO" sz="1200" b="1" baseline="0" dirty="0"/>
               <a:t>Tecnología Única: </a:t>
             </a:r>
             <a:r>
-              <a:rPr lang="es-CO" sz="1200" b="0" baseline="0" dirty="0" smtClean="0"/>
+              <a:rPr lang="es-CO" sz="1200" b="0" baseline="0" dirty="0"/>
               <a:t>Generalmente los componentes se desarrollan en la misma tecnología lo que facilita que cualquier desarrollador pueda modificar cualquier componente.</a:t>
             </a:r>
           </a:p>
@@ -2202,7 +2191,7 @@
               <a:tabLst/>
               <a:defRPr/>
             </a:pPr>
-            <a:endParaRPr lang="es-CO" sz="1200" dirty="0" smtClean="0"/>
+            <a:endParaRPr lang="es-CO" sz="1200" dirty="0"/>
           </a:p>
           <a:p>
             <a:pPr marL="0" marR="0" lvl="0" indent="0" algn="l" defTabSz="914400" rtl="0" eaLnBrk="1" fontAlgn="auto" latinLnBrk="0" hangingPunct="1">
@@ -2223,7 +2212,7 @@
               <a:defRPr/>
             </a:pPr>
             <a:r>
-              <a:rPr lang="es-CO" sz="1200" b="1" dirty="0" smtClean="0"/>
+              <a:rPr lang="es-CO" sz="1200" b="1" dirty="0"/>
               <a:t>Desventajas</a:t>
             </a:r>
           </a:p>
@@ -2246,11 +2235,11 @@
               <a:defRPr/>
             </a:pPr>
             <a:r>
-              <a:rPr lang="es-CO" sz="1200" b="1" dirty="0" smtClean="0"/>
+              <a:rPr lang="es-CO" sz="1200" b="1" dirty="0"/>
               <a:t>Tamaño y complejidad limitadas: </a:t>
             </a:r>
             <a:r>
-              <a:rPr lang="es-CO" sz="1200" b="0" i="0" kern="1200" dirty="0" smtClean="0">
+              <a:rPr lang="es-CO" sz="1200" b="0" i="0" kern="1200" dirty="0">
                 <a:solidFill>
                   <a:schemeClr val="tx1"/>
                 </a:solidFill>
@@ -2281,11 +2270,11 @@
               <a:defRPr/>
             </a:pPr>
             <a:r>
-              <a:rPr lang="es-CO" sz="1200" b="1" dirty="0" smtClean="0"/>
+              <a:rPr lang="es-CO" sz="1200" b="1" dirty="0"/>
               <a:t>Arranque Lento: </a:t>
             </a:r>
             <a:r>
-              <a:rPr lang="es-CO" sz="1200" b="0" i="0" kern="1200" dirty="0" smtClean="0">
+              <a:rPr lang="es-CO" sz="1200" b="0" i="0" kern="1200" dirty="0">
                 <a:solidFill>
                   <a:schemeClr val="tx1"/>
                 </a:solidFill>
@@ -2316,7 +2305,7 @@
               <a:defRPr/>
             </a:pPr>
             <a:r>
-              <a:rPr lang="es-CO" sz="1200" b="1" i="0" kern="1200" dirty="0" smtClean="0">
+              <a:rPr lang="es-CO" sz="1200" b="1" i="0" kern="1200" dirty="0">
                 <a:solidFill>
                   <a:schemeClr val="tx1"/>
                 </a:solidFill>
@@ -2328,7 +2317,7 @@
               <a:t>Fiabilidad de la aplicación:</a:t>
             </a:r>
             <a:r>
-              <a:rPr lang="es-CO" sz="1200" b="0" i="0" kern="1200" dirty="0" smtClean="0">
+              <a:rPr lang="es-CO" sz="1200" b="0" i="0" kern="1200" dirty="0">
                 <a:solidFill>
                   <a:schemeClr val="tx1"/>
                 </a:solidFill>
@@ -2359,7 +2348,7 @@
               <a:defRPr/>
             </a:pPr>
             <a:r>
-              <a:rPr lang="es-CO" sz="1200" b="1" i="0" kern="1200" dirty="0" smtClean="0">
+              <a:rPr lang="es-CO" sz="1200" b="1" i="0" kern="1200" dirty="0">
                 <a:solidFill>
                   <a:schemeClr val="tx1"/>
                 </a:solidFill>
@@ -2371,7 +2360,7 @@
               <a:t>Escalabilidad Modular deficiente:</a:t>
             </a:r>
             <a:r>
-              <a:rPr lang="es-CO" sz="1200" b="0" i="0" kern="1200" dirty="0" smtClean="0">
+              <a:rPr lang="es-CO" sz="1200" b="0" i="0" kern="1200" dirty="0">
                 <a:solidFill>
                   <a:schemeClr val="tx1"/>
                 </a:solidFill>
@@ -2383,7 +2372,7 @@
               <a:t> Querer escalar o aumentar capacidad de un modulo </a:t>
             </a:r>
             <a:r>
-              <a:rPr lang="es-CO" sz="1200" b="0" i="0" kern="1200" dirty="0" err="1" smtClean="0">
+              <a:rPr lang="es-CO" sz="1200" b="0" i="0" kern="1200" dirty="0" err="1">
                 <a:solidFill>
                   <a:schemeClr val="tx1"/>
                 </a:solidFill>
@@ -2395,7 +2384,7 @@
               <a:t>enera</a:t>
             </a:r>
             <a:r>
-              <a:rPr lang="es-CO" sz="1200" b="0" i="0" kern="1200" dirty="0" smtClean="0">
+              <a:rPr lang="es-CO" sz="1200" b="0" i="0" kern="1200" dirty="0">
                 <a:solidFill>
                   <a:schemeClr val="tx1"/>
                 </a:solidFill>
@@ -2407,7 +2396,7 @@
               <a:t> la </a:t>
             </a:r>
             <a:r>
-              <a:rPr lang="es-CO" sz="1200" b="0" i="0" kern="1200" dirty="0" err="1" smtClean="0">
+              <a:rPr lang="es-CO" sz="1200" b="0" i="0" kern="1200" dirty="0" err="1">
                 <a:solidFill>
                   <a:schemeClr val="tx1"/>
                 </a:solidFill>
@@ -2419,7 +2408,7 @@
               <a:t>adicion</a:t>
             </a:r>
             <a:r>
-              <a:rPr lang="es-CO" sz="1200" b="0" i="0" kern="1200" dirty="0" smtClean="0">
+              <a:rPr lang="es-CO" sz="1200" b="0" i="0" kern="1200" dirty="0">
                 <a:solidFill>
                   <a:schemeClr val="tx1"/>
                 </a:solidFill>
@@ -2449,7 +2438,7 @@
               <a:tabLst/>
               <a:defRPr/>
             </a:pPr>
-            <a:endParaRPr lang="es-CO" sz="1200" b="1" i="0" kern="1200" dirty="0" smtClean="0">
+            <a:endParaRPr lang="es-CO" sz="1200" b="1" i="0" kern="1200" dirty="0">
               <a:solidFill>
                 <a:schemeClr val="tx1"/>
               </a:solidFill>
@@ -2477,7 +2466,7 @@
               <a:tabLst/>
               <a:defRPr/>
             </a:pPr>
-            <a:endParaRPr lang="es-CO" sz="1200" b="0" i="0" kern="1200" dirty="0" smtClean="0">
+            <a:endParaRPr lang="es-CO" sz="1200" b="0" i="0" kern="1200" dirty="0">
               <a:solidFill>
                 <a:schemeClr val="tx1"/>
               </a:solidFill>
@@ -2505,7 +2494,7 @@
               <a:tabLst/>
               <a:defRPr/>
             </a:pPr>
-            <a:endParaRPr lang="es-CO" sz="1200" b="1" dirty="0" smtClean="0"/>
+            <a:endParaRPr lang="es-CO" sz="1200" b="1" dirty="0"/>
           </a:p>
           <a:p>
             <a:endParaRPr lang="es-CO" dirty="0"/>
@@ -2591,7 +2580,7 @@
         <p:spPr/>
         <p:txBody>
           <a:bodyPr>
-            <a:normAutofit fontScale="40000" lnSpcReduction="20000"/>
+            <a:normAutofit fontScale="70000" lnSpcReduction="20000"/>
           </a:bodyPr>
           <a:lstStyle/>
           <a:p>
@@ -2613,7 +2602,7 @@
               <a:defRPr/>
             </a:pPr>
             <a:r>
-              <a:rPr lang="es-CO" sz="1200" b="0" dirty="0" smtClean="0"/>
+              <a:rPr lang="es-CO" sz="1200" b="0" dirty="0"/>
               <a:t>https://www.ilimit.com/blog/arquitecturas-monoliticas-o-arquitectura-de-microservicios-ventajas-e-inconvenientes/</a:t>
             </a:r>
           </a:p>
@@ -2636,7 +2625,7 @@
               <a:defRPr/>
             </a:pPr>
             <a:r>
-              <a:rPr lang="es-CO" sz="1200" b="0" dirty="0" smtClean="0"/>
+              <a:rPr lang="es-CO" sz="1200" b="0" dirty="0"/>
               <a:t>https://ealmeida.blogspot.com/2019/10/aplicacion-monolitica-o-distribuida.html</a:t>
             </a:r>
           </a:p>
@@ -2658,7 +2647,7 @@
               <a:tabLst/>
               <a:defRPr/>
             </a:pPr>
-            <a:endParaRPr lang="es-CO" sz="1200" b="0" dirty="0" smtClean="0"/>
+            <a:endParaRPr lang="es-CO" sz="1200" b="0" dirty="0"/>
           </a:p>
           <a:p>
             <a:pPr marL="0" marR="0" lvl="0" indent="0" algn="l" defTabSz="914400" rtl="0" eaLnBrk="1" fontAlgn="auto" latinLnBrk="0" hangingPunct="1">
@@ -2679,18 +2668,13 @@
               <a:defRPr/>
             </a:pPr>
             <a:r>
-              <a:rPr lang="es-CO" sz="1200" b="1" dirty="0" smtClean="0">
+              <a:rPr lang="es-CO" sz="1200" b="1" dirty="0">
                 <a:solidFill>
                   <a:srgbClr val="00B050"/>
                 </a:solidFill>
               </a:rPr>
               <a:t>Ventajas</a:t>
             </a:r>
-            <a:endParaRPr lang="es-CO" sz="1200" b="1" dirty="0" smtClean="0">
-              <a:solidFill>
-                <a:srgbClr val="00B050"/>
-              </a:solidFill>
-            </a:endParaRPr>
           </a:p>
           <a:p>
             <a:pPr marL="171450" marR="0" lvl="0" indent="-171450" algn="l" defTabSz="914400" rtl="0" eaLnBrk="1" fontAlgn="auto" latinLnBrk="0" hangingPunct="1">
@@ -2711,11 +2695,11 @@
               <a:defRPr/>
             </a:pPr>
             <a:r>
-              <a:rPr lang="es-CO" sz="1200" b="1" dirty="0" smtClean="0"/>
+              <a:rPr lang="es-CO" sz="1200" b="1" dirty="0"/>
               <a:t>Fácil de desarrollar y Mantener: </a:t>
             </a:r>
             <a:r>
-              <a:rPr lang="es-CO" sz="1200" b="0" i="0" kern="1200" dirty="0" smtClean="0">
+              <a:rPr lang="es-CO" sz="1200" b="0" i="0" kern="1200" dirty="0">
                 <a:solidFill>
                   <a:schemeClr val="tx1"/>
                 </a:solidFill>
@@ -2727,7 +2711,7 @@
               <a:t>un </a:t>
             </a:r>
             <a:r>
-              <a:rPr lang="es-CO" sz="1200" b="0" i="0" kern="1200" dirty="0" err="1" smtClean="0">
+              <a:rPr lang="es-CO" sz="1200" b="0" i="0" kern="1200" dirty="0" err="1">
                 <a:solidFill>
                   <a:schemeClr val="tx1"/>
                 </a:solidFill>
@@ -2739,7 +2723,7 @@
               <a:t>microservicio</a:t>
             </a:r>
             <a:r>
-              <a:rPr lang="es-CO" sz="1200" b="0" i="0" kern="1200" dirty="0" smtClean="0">
+              <a:rPr lang="es-CO" sz="1200" b="0" i="0" kern="1200" dirty="0">
                 <a:solidFill>
                   <a:schemeClr val="tx1"/>
                 </a:solidFill>
@@ -2748,19 +2732,7 @@
                 <a:ea typeface="+mn-ea"/>
                 <a:cs typeface="+mn-cs"/>
               </a:rPr>
-              <a:t> solo puede centrarse en una función comercial específica, por lo que su negocio es claro y entendible, la cantidad de código es </a:t>
-            </a:r>
-            <a:r>
-              <a:rPr lang="es-CO" sz="1200" b="0" i="0" kern="1200" dirty="0" smtClean="0">
-                <a:solidFill>
-                  <a:schemeClr val="tx1"/>
-                </a:solidFill>
-                <a:effectLst/>
-                <a:latin typeface="+mn-lt"/>
-                <a:ea typeface="+mn-ea"/>
-                <a:cs typeface="+mn-cs"/>
-              </a:rPr>
-              <a:t>pequeña</a:t>
+              <a:t> solo puede centrarse en una función comercial específica, por lo que su negocio es claro y entendible, la cantidad de código es pequeña</a:t>
             </a:r>
           </a:p>
           <a:p>
@@ -2782,7 +2754,7 @@
               <a:defRPr/>
             </a:pPr>
             <a:r>
-              <a:rPr lang="es-CO" sz="1200" b="1" i="0" kern="1200" dirty="0" smtClean="0">
+              <a:rPr lang="es-CO" sz="1200" b="1" i="0" kern="1200" dirty="0">
                 <a:solidFill>
                   <a:schemeClr val="tx1"/>
                 </a:solidFill>
@@ -2794,7 +2766,7 @@
               <a:t>Fácil</a:t>
             </a:r>
             <a:r>
-              <a:rPr lang="es-CO" sz="1200" b="1" i="0" kern="1200" baseline="0" dirty="0" smtClean="0">
+              <a:rPr lang="es-CO" sz="1200" b="1" i="0" kern="1200" baseline="0" dirty="0">
                 <a:solidFill>
                   <a:schemeClr val="tx1"/>
                 </a:solidFill>
@@ -2806,7 +2778,7 @@
               <a:t> despliegue e instalación: </a:t>
             </a:r>
             <a:r>
-              <a:rPr lang="es-CO" sz="1200" b="0" i="0" kern="1200" dirty="0" smtClean="0">
+              <a:rPr lang="es-CO" sz="1200" b="0" i="0" kern="1200" dirty="0">
                 <a:solidFill>
                   <a:schemeClr val="tx1"/>
                 </a:solidFill>
@@ -2815,10 +2787,10 @@
                 <a:ea typeface="+mn-ea"/>
                 <a:cs typeface="+mn-cs"/>
               </a:rPr>
-              <a:t>El</a:t>
-            </a:r>
-            <a:r>
-              <a:rPr lang="es-CO" sz="1200" b="0" i="0" kern="1200" dirty="0" smtClean="0">
+              <a:t>El </a:t>
+            </a:r>
+            <a:r>
+              <a:rPr lang="es-CO" sz="1200" b="1" i="0" kern="1200" dirty="0">
                 <a:solidFill>
                   <a:schemeClr val="tx1"/>
                 </a:solidFill>
@@ -2827,10 +2799,10 @@
                 <a:ea typeface="+mn-ea"/>
                 <a:cs typeface="+mn-cs"/>
               </a:rPr>
-              <a:t> </a:t>
-            </a:r>
-            <a:r>
-              <a:rPr lang="es-CO" sz="1200" b="1" i="0" kern="1200" dirty="0" smtClean="0">
+              <a:t>despliegue independiente</a:t>
+            </a:r>
+            <a:r>
+              <a:rPr lang="es-CO" sz="1200" b="0" i="0" kern="1200" dirty="0">
                 <a:solidFill>
                   <a:schemeClr val="tx1"/>
                 </a:solidFill>
@@ -2839,10 +2811,10 @@
                 <a:ea typeface="+mn-ea"/>
                 <a:cs typeface="+mn-cs"/>
               </a:rPr>
-              <a:t>despliegue independiente</a:t>
-            </a:r>
-            <a:r>
-              <a:rPr lang="es-CO" sz="1200" b="0" i="0" kern="1200" dirty="0" smtClean="0">
+              <a:t> de cada uno de los componentes de la aplicación. </a:t>
+            </a:r>
+            <a:r>
+              <a:rPr lang="es-CO" sz="1200" b="1" i="0" kern="1200" dirty="0">
                 <a:solidFill>
                   <a:schemeClr val="tx1"/>
                 </a:solidFill>
@@ -2851,10 +2823,10 @@
                 <a:ea typeface="+mn-ea"/>
                 <a:cs typeface="+mn-cs"/>
               </a:rPr>
-              <a:t> de cada uno de los componentes de la </a:t>
-            </a:r>
-            <a:r>
-              <a:rPr lang="es-CO" sz="1200" b="0" i="0" kern="1200" dirty="0" smtClean="0">
+              <a:t>Facilita las actualizaciones</a:t>
+            </a:r>
+            <a:r>
+              <a:rPr lang="es-CO" sz="1200" b="0" i="0" kern="1200" dirty="0">
                 <a:solidFill>
                   <a:schemeClr val="tx1"/>
                 </a:solidFill>
@@ -2863,55 +2835,7 @@
                 <a:ea typeface="+mn-ea"/>
                 <a:cs typeface="+mn-cs"/>
               </a:rPr>
-              <a:t>aplicación. </a:t>
-            </a:r>
-            <a:r>
-              <a:rPr lang="es-CO" sz="1200" b="1" i="0" kern="1200" dirty="0" smtClean="0">
-                <a:solidFill>
-                  <a:schemeClr val="tx1"/>
-                </a:solidFill>
-                <a:effectLst/>
-                <a:latin typeface="+mn-lt"/>
-                <a:ea typeface="+mn-ea"/>
-                <a:cs typeface="+mn-cs"/>
-              </a:rPr>
-              <a:t>Facilita </a:t>
-            </a:r>
-            <a:r>
-              <a:rPr lang="es-CO" sz="1200" b="1" i="0" kern="1200" dirty="0" smtClean="0">
-                <a:solidFill>
-                  <a:schemeClr val="tx1"/>
-                </a:solidFill>
-                <a:effectLst/>
-                <a:latin typeface="+mn-lt"/>
-                <a:ea typeface="+mn-ea"/>
-                <a:cs typeface="+mn-cs"/>
-              </a:rPr>
-              <a:t>las actualizaciones</a:t>
-            </a:r>
-            <a:r>
-              <a:rPr lang="es-CO" sz="1200" b="0" i="0" kern="1200" dirty="0" smtClean="0">
-                <a:solidFill>
-                  <a:schemeClr val="tx1"/>
-                </a:solidFill>
-                <a:effectLst/>
-                <a:latin typeface="+mn-lt"/>
-                <a:ea typeface="+mn-ea"/>
-                <a:cs typeface="+mn-cs"/>
-              </a:rPr>
-              <a:t> al no tener que parar todo el proyecto, solo el módulo a </a:t>
-            </a:r>
-            <a:r>
-              <a:rPr lang="es-CO" sz="1200" b="0" i="0" kern="1200" dirty="0" smtClean="0">
-                <a:solidFill>
-                  <a:schemeClr val="tx1"/>
-                </a:solidFill>
-                <a:effectLst/>
-                <a:latin typeface="+mn-lt"/>
-                <a:ea typeface="+mn-ea"/>
-                <a:cs typeface="+mn-cs"/>
-              </a:rPr>
-              <a:t>actualizar.</a:t>
+              <a:t> al no tener que parar todo el proyecto, solo el módulo a actualizar.</a:t>
             </a:r>
           </a:p>
           <a:p>
@@ -2933,7 +2857,7 @@
               <a:defRPr/>
             </a:pPr>
             <a:r>
-              <a:rPr lang="es-CO" sz="1200" b="1" i="0" kern="1200" dirty="0" err="1" smtClean="0">
+              <a:rPr lang="es-CO" sz="1200" b="1" i="0" kern="1200" dirty="0" err="1">
                 <a:solidFill>
                   <a:schemeClr val="tx1"/>
                 </a:solidFill>
@@ -2945,7 +2869,7 @@
               <a:t>Multiples</a:t>
             </a:r>
             <a:r>
-              <a:rPr lang="es-CO" sz="1200" b="1" i="0" kern="1200" baseline="0" dirty="0" smtClean="0">
+              <a:rPr lang="es-CO" sz="1200" b="1" i="0" kern="1200" baseline="0" dirty="0">
                 <a:solidFill>
                   <a:schemeClr val="tx1"/>
                 </a:solidFill>
@@ -2957,7 +2881,7 @@
               <a:t> lenguajes</a:t>
             </a:r>
             <a:r>
-              <a:rPr lang="es-CO" sz="1200" b="0" i="0" kern="1200" baseline="0" dirty="0" smtClean="0">
+              <a:rPr lang="es-CO" sz="1200" b="0" i="0" kern="1200" baseline="0" dirty="0">
                 <a:solidFill>
                   <a:schemeClr val="tx1"/>
                 </a:solidFill>
@@ -2969,7 +2893,7 @@
               <a:t>: </a:t>
             </a:r>
             <a:r>
-              <a:rPr lang="es-CO" sz="1200" b="0" i="0" kern="1200" dirty="0" smtClean="0">
+              <a:rPr lang="es-CO" sz="1200" b="0" i="0" kern="1200" dirty="0">
                 <a:solidFill>
                   <a:schemeClr val="tx1"/>
                 </a:solidFill>
@@ -2978,10 +2902,10 @@
                 <a:ea typeface="+mn-ea"/>
                 <a:cs typeface="+mn-cs"/>
               </a:rPr>
-              <a:t>Permite</a:t>
-            </a:r>
-            <a:r>
-              <a:rPr lang="es-CO" sz="1200" b="0" i="0" kern="1200" dirty="0" smtClean="0">
+              <a:t>Permite </a:t>
+            </a:r>
+            <a:r>
+              <a:rPr lang="es-CO" sz="1200" b="1" i="0" kern="1200" dirty="0">
                 <a:solidFill>
                   <a:schemeClr val="tx1"/>
                 </a:solidFill>
@@ -2990,10 +2914,10 @@
                 <a:ea typeface="+mn-ea"/>
                 <a:cs typeface="+mn-cs"/>
               </a:rPr>
-              <a:t> </a:t>
-            </a:r>
-            <a:r>
-              <a:rPr lang="es-CO" sz="1200" b="1" i="0" kern="1200" dirty="0" smtClean="0">
+              <a:t>desarrollar utilizando múltiples lenguajes de programación</a:t>
+            </a:r>
+            <a:r>
+              <a:rPr lang="es-CO" sz="1200" b="0" i="0" kern="1200" dirty="0">
                 <a:solidFill>
                   <a:schemeClr val="tx1"/>
                 </a:solidFill>
@@ -3002,31 +2926,7 @@
                 <a:ea typeface="+mn-ea"/>
                 <a:cs typeface="+mn-cs"/>
               </a:rPr>
-              <a:t>desarrollar utilizando múltiples lenguajes de programación</a:t>
-            </a:r>
-            <a:r>
-              <a:rPr lang="es-CO" sz="1200" b="0" i="0" kern="1200" dirty="0" smtClean="0">
-                <a:solidFill>
-                  <a:schemeClr val="tx1"/>
-                </a:solidFill>
-                <a:effectLst/>
-                <a:latin typeface="+mn-lt"/>
-                <a:ea typeface="+mn-ea"/>
-                <a:cs typeface="+mn-cs"/>
-              </a:rPr>
-              <a:t>, lo que aporta ventajas como velocidad, rendimiento, reducción de costes, elección de distintas herramientas de desarrollo, </a:t>
-            </a:r>
-            <a:r>
-              <a:rPr lang="es-CO" sz="1200" b="0" i="0" kern="1200" dirty="0" smtClean="0">
-                <a:solidFill>
-                  <a:schemeClr val="tx1"/>
-                </a:solidFill>
-                <a:effectLst/>
-                <a:latin typeface="+mn-lt"/>
-                <a:ea typeface="+mn-ea"/>
-                <a:cs typeface="+mn-cs"/>
-              </a:rPr>
-              <a:t>etc.</a:t>
+              <a:t>, lo que aporta ventajas como velocidad, rendimiento, reducción de costes, elección de distintas herramientas de desarrollo, etc.</a:t>
             </a:r>
           </a:p>
           <a:p>
@@ -3048,7 +2948,7 @@
               <a:defRPr/>
             </a:pPr>
             <a:r>
-              <a:rPr lang="es-CO" sz="1200" b="1" i="0" kern="1200" dirty="0" smtClean="0">
+              <a:rPr lang="es-CO" sz="1200" b="1" i="0" kern="1200" dirty="0">
                 <a:solidFill>
                   <a:schemeClr val="tx1"/>
                 </a:solidFill>
@@ -3057,10 +2957,10 @@
                 <a:ea typeface="+mn-ea"/>
                 <a:cs typeface="+mn-cs"/>
               </a:rPr>
-              <a:t>Escalabilidad </a:t>
-            </a:r>
-            <a:r>
-              <a:rPr lang="es-CO" sz="1200" b="1" i="0" kern="1200" dirty="0" smtClean="0">
+              <a:t>Escalabilidad por módulos</a:t>
+            </a:r>
+            <a:r>
+              <a:rPr lang="es-CO" sz="1200" b="0" i="0" kern="1200" dirty="0">
                 <a:solidFill>
                   <a:schemeClr val="tx1"/>
                 </a:solidFill>
@@ -3069,31 +2969,7 @@
                 <a:ea typeface="+mn-ea"/>
                 <a:cs typeface="+mn-cs"/>
               </a:rPr>
-              <a:t>por módulos</a:t>
-            </a:r>
-            <a:r>
-              <a:rPr lang="es-CO" sz="1200" b="0" i="0" kern="1200" dirty="0" smtClean="0">
-                <a:solidFill>
-                  <a:schemeClr val="tx1"/>
-                </a:solidFill>
-                <a:effectLst/>
-                <a:latin typeface="+mn-lt"/>
-                <a:ea typeface="+mn-ea"/>
-                <a:cs typeface="+mn-cs"/>
-              </a:rPr>
-              <a:t>, permitiendo incrementar las capacidades de cómputo del módulo que mayor carga soporte o mayor demanda tenga (al poderse instalar en distintos servidores los módulos de la aplicación</a:t>
-            </a:r>
-            <a:r>
-              <a:rPr lang="es-CO" sz="1200" b="0" i="0" kern="1200" dirty="0" smtClean="0">
-                <a:solidFill>
-                  <a:schemeClr val="tx1"/>
-                </a:solidFill>
-                <a:effectLst/>
-                <a:latin typeface="+mn-lt"/>
-                <a:ea typeface="+mn-ea"/>
-                <a:cs typeface="+mn-cs"/>
-              </a:rPr>
-              <a:t>).</a:t>
+              <a:t>, permitiendo incrementar las capacidades de cómputo del módulo que mayor carga soporte o mayor demanda tenga (al poderse instalar en distintos servidores los módulos de la aplicación).</a:t>
             </a:r>
           </a:p>
           <a:p>
@@ -3115,7 +2991,7 @@
               <a:defRPr/>
             </a:pPr>
             <a:r>
-              <a:rPr lang="es-CO" sz="1200" b="1" i="0" kern="1200" dirty="0" smtClean="0">
+              <a:rPr lang="es-CO" sz="1200" b="1" i="0" kern="1200" dirty="0">
                 <a:solidFill>
                   <a:schemeClr val="tx1"/>
                 </a:solidFill>
@@ -3127,7 +3003,7 @@
               <a:t>Entrega</a:t>
             </a:r>
             <a:r>
-              <a:rPr lang="es-CO" sz="1200" b="1" i="0" kern="1200" baseline="0" dirty="0" smtClean="0">
+              <a:rPr lang="es-CO" sz="1200" b="1" i="0" kern="1200" baseline="0" dirty="0">
                 <a:solidFill>
                   <a:schemeClr val="tx1"/>
                 </a:solidFill>
@@ -3139,7 +3015,7 @@
               <a:t> Continua: </a:t>
             </a:r>
             <a:r>
-              <a:rPr lang="es-CO" sz="1200" b="0" i="0" kern="1200" dirty="0" smtClean="0">
+              <a:rPr lang="es-CO" sz="1200" b="0" i="0" kern="1200" dirty="0">
                 <a:solidFill>
                   <a:schemeClr val="tx1"/>
                 </a:solidFill>
@@ -3148,10 +3024,10 @@
                 <a:ea typeface="+mn-ea"/>
                 <a:cs typeface="+mn-cs"/>
               </a:rPr>
-              <a:t>Permite </a:t>
-            </a:r>
-            <a:r>
-              <a:rPr lang="es-CO" sz="1200" b="0" i="0" kern="1200" dirty="0" smtClean="0">
+              <a:t>Permite realizar una </a:t>
+            </a:r>
+            <a:r>
+              <a:rPr lang="es-CO" sz="1200" b="1" i="0" kern="1200" dirty="0">
                 <a:solidFill>
                   <a:schemeClr val="tx1"/>
                 </a:solidFill>
@@ -3160,10 +3036,10 @@
                 <a:ea typeface="+mn-ea"/>
                 <a:cs typeface="+mn-cs"/>
               </a:rPr>
-              <a:t>realizar una </a:t>
-            </a:r>
-            <a:r>
-              <a:rPr lang="es-CO" sz="1200" b="1" i="0" kern="1200" dirty="0" smtClean="0">
+              <a:t>entrega continua</a:t>
+            </a:r>
+            <a:r>
+              <a:rPr lang="es-CO" sz="1200" b="0" i="0" kern="1200" dirty="0">
                 <a:solidFill>
                   <a:schemeClr val="tx1"/>
                 </a:solidFill>
@@ -3172,31 +3048,7 @@
                 <a:ea typeface="+mn-ea"/>
                 <a:cs typeface="+mn-cs"/>
               </a:rPr>
-              <a:t>entrega continua</a:t>
-            </a:r>
-            <a:r>
-              <a:rPr lang="es-CO" sz="1200" b="0" i="0" kern="1200" dirty="0" smtClean="0">
-                <a:solidFill>
-                  <a:schemeClr val="tx1"/>
-                </a:solidFill>
-                <a:effectLst/>
-                <a:latin typeface="+mn-lt"/>
-                <a:ea typeface="+mn-ea"/>
-                <a:cs typeface="+mn-cs"/>
-              </a:rPr>
-              <a:t> de software a los clientes de una forma mucho más </a:t>
-            </a:r>
-            <a:r>
-              <a:rPr lang="es-CO" sz="1200" b="0" i="0" kern="1200" dirty="0" smtClean="0">
-                <a:solidFill>
-                  <a:schemeClr val="tx1"/>
-                </a:solidFill>
-                <a:effectLst/>
-                <a:latin typeface="+mn-lt"/>
-                <a:ea typeface="+mn-ea"/>
-                <a:cs typeface="+mn-cs"/>
-              </a:rPr>
-              <a:t>ágil.</a:t>
+              <a:t> de software a los clientes de una forma mucho más ágil.</a:t>
             </a:r>
           </a:p>
           <a:p>
@@ -3218,7 +3070,7 @@
               <a:defRPr/>
             </a:pPr>
             <a:r>
-              <a:rPr lang="es-CO" sz="1200" b="1" i="0" kern="1200" dirty="0" smtClean="0">
+              <a:rPr lang="es-CO" sz="1200" b="1" i="0" kern="1200" dirty="0">
                 <a:solidFill>
                   <a:schemeClr val="tx1"/>
                 </a:solidFill>
@@ -3230,7 +3082,7 @@
               <a:t>Fácil de </a:t>
             </a:r>
             <a:r>
-              <a:rPr lang="es-CO" sz="1200" b="1" i="0" kern="1200" dirty="0" err="1" smtClean="0">
+              <a:rPr lang="es-CO" sz="1200" b="1" i="0" kern="1200" dirty="0" err="1">
                 <a:solidFill>
                   <a:schemeClr val="tx1"/>
                 </a:solidFill>
@@ -3242,7 +3094,7 @@
               <a:t>probrar</a:t>
             </a:r>
             <a:r>
-              <a:rPr lang="es-CO" sz="1200" b="1" i="0" kern="1200" dirty="0" smtClean="0">
+              <a:rPr lang="es-CO" sz="1200" b="1" i="0" kern="1200" dirty="0">
                 <a:solidFill>
                   <a:schemeClr val="tx1"/>
                 </a:solidFill>
@@ -3254,7 +3106,7 @@
               <a:t>: </a:t>
             </a:r>
             <a:r>
-              <a:rPr lang="es-CO" sz="1200" b="0" i="0" kern="1200" dirty="0" smtClean="0">
+              <a:rPr lang="es-CO" sz="1200" b="0" i="0" kern="1200" dirty="0">
                 <a:solidFill>
                   <a:schemeClr val="tx1"/>
                 </a:solidFill>
@@ -3263,10 +3115,10 @@
                 <a:ea typeface="+mn-ea"/>
                 <a:cs typeface="+mn-cs"/>
               </a:rPr>
-              <a:t>Reduce </a:t>
-            </a:r>
-            <a:r>
-              <a:rPr lang="es-CO" sz="1200" b="0" i="0" kern="1200" dirty="0" smtClean="0">
+              <a:t>Reduce los errores de programación y </a:t>
+            </a:r>
+            <a:r>
+              <a:rPr lang="es-CO" sz="1200" b="1" i="0" kern="1200" dirty="0">
                 <a:solidFill>
                   <a:schemeClr val="tx1"/>
                 </a:solidFill>
@@ -3275,10 +3127,10 @@
                 <a:ea typeface="+mn-ea"/>
                 <a:cs typeface="+mn-cs"/>
               </a:rPr>
-              <a:t>los errores de programación y </a:t>
-            </a:r>
-            <a:r>
-              <a:rPr lang="es-CO" sz="1200" b="1" i="0" kern="1200" dirty="0" smtClean="0">
+              <a:t>facilita los procesos de pruebas y test</a:t>
+            </a:r>
+            <a:r>
+              <a:rPr lang="es-CO" sz="1200" b="0" i="0" kern="1200" dirty="0">
                 <a:solidFill>
                   <a:schemeClr val="tx1"/>
                 </a:solidFill>
@@ -3287,10 +3139,10 @@
                 <a:ea typeface="+mn-ea"/>
                 <a:cs typeface="+mn-cs"/>
               </a:rPr>
-              <a:t>facilita los procesos de pruebas y </a:t>
-            </a:r>
-            <a:r>
-              <a:rPr lang="es-CO" sz="1200" b="1" i="0" kern="1200" dirty="0" smtClean="0">
+              <a:t>,</a:t>
+            </a:r>
+            <a:r>
+              <a:rPr lang="es-CO" sz="1200" b="0" i="0" kern="1200" baseline="0" dirty="0">
                 <a:solidFill>
                   <a:schemeClr val="tx1"/>
                 </a:solidFill>
@@ -3299,33 +3151,9 @@
                 <a:ea typeface="+mn-ea"/>
                 <a:cs typeface="+mn-cs"/>
               </a:rPr>
-              <a:t>test</a:t>
-            </a:r>
-            <a:r>
-              <a:rPr lang="es-CO" sz="1200" b="0" i="0" kern="1200" dirty="0" smtClean="0">
-                <a:solidFill>
-                  <a:schemeClr val="tx1"/>
-                </a:solidFill>
-                <a:effectLst/>
-                <a:latin typeface="+mn-lt"/>
-                <a:ea typeface="+mn-ea"/>
-                <a:cs typeface="+mn-cs"/>
-              </a:rPr>
-              <a:t>,</a:t>
-            </a:r>
-            <a:r>
-              <a:rPr lang="es-CO" sz="1200" b="0" i="0" kern="1200" baseline="0" dirty="0" smtClean="0">
-                <a:solidFill>
-                  <a:schemeClr val="tx1"/>
-                </a:solidFill>
-                <a:effectLst/>
-                <a:latin typeface="+mn-lt"/>
-                <a:ea typeface="+mn-ea"/>
-                <a:cs typeface="+mn-cs"/>
-              </a:rPr>
               <a:t> por ser una funcionalidad mas pequeña y asilada.</a:t>
             </a:r>
-            <a:endParaRPr lang="es-CO" sz="1200" b="0" i="0" kern="1200" dirty="0" smtClean="0">
+            <a:endParaRPr lang="es-CO" sz="1200" b="0" i="0" kern="1200" dirty="0">
               <a:solidFill>
                 <a:schemeClr val="tx1"/>
               </a:solidFill>
@@ -3353,7 +3181,7 @@
               <a:tabLst/>
               <a:defRPr/>
             </a:pPr>
-            <a:endParaRPr lang="es-CO" sz="1200" b="1" dirty="0" smtClean="0"/>
+            <a:endParaRPr lang="es-CO" sz="1200" b="1" dirty="0"/>
           </a:p>
           <a:p>
             <a:pPr marL="171450" marR="0" lvl="0" indent="-171450" algn="l" defTabSz="914400" rtl="0" eaLnBrk="1" fontAlgn="auto" latinLnBrk="0" hangingPunct="1">
@@ -3373,7 +3201,7 @@
               <a:tabLst/>
               <a:defRPr/>
             </a:pPr>
-            <a:endParaRPr lang="es-CO" sz="1200" dirty="0" smtClean="0"/>
+            <a:endParaRPr lang="es-CO" sz="1200" dirty="0"/>
           </a:p>
           <a:p>
             <a:pPr marL="0" marR="0" lvl="0" indent="0" algn="l" defTabSz="914400" rtl="0" eaLnBrk="1" fontAlgn="auto" latinLnBrk="0" hangingPunct="1">
@@ -3394,7 +3222,7 @@
               <a:defRPr/>
             </a:pPr>
             <a:r>
-              <a:rPr lang="es-CO" sz="1200" b="1" dirty="0" smtClean="0"/>
+              <a:rPr lang="es-CO" sz="1200" b="1" dirty="0"/>
               <a:t>Desventajas</a:t>
             </a:r>
           </a:p>
@@ -3417,19 +3245,13 @@
               <a:defRPr/>
             </a:pPr>
             <a:r>
-              <a:rPr lang="es-CO" b="1" dirty="0" smtClean="0">
+              <a:rPr lang="es-CO" b="1" dirty="0">
                 <a:effectLst/>
               </a:rPr>
-              <a:t>Complejidad </a:t>
-            </a:r>
-            <a:r>
-              <a:rPr lang="es-CO" b="1" dirty="0" smtClean="0">
-                <a:effectLst/>
-              </a:rPr>
-              <a:t>de la arquitectura. </a:t>
-            </a:r>
-            <a:r>
-              <a:rPr lang="es-CO" sz="1200" b="0" i="0" kern="1200" dirty="0" smtClean="0">
+              <a:t>Complejidad de la arquitectura. </a:t>
+            </a:r>
+            <a:r>
+              <a:rPr lang="es-CO" sz="1200" b="0" i="0" kern="1200" dirty="0">
                 <a:solidFill>
                   <a:schemeClr val="tx1"/>
                 </a:solidFill>
@@ -3441,7 +3263,7 @@
               <a:t>Al tener servicios independientes, vamos a tener que elegir de que forma van a conectarse dichos servicios, con comunicaciones entre procesos (</a:t>
             </a:r>
             <a:r>
-              <a:rPr lang="es-CO" sz="1200" b="0" i="0" kern="1200" dirty="0" err="1" smtClean="0">
+              <a:rPr lang="es-CO" sz="1200" b="0" i="0" kern="1200" dirty="0" err="1">
                 <a:solidFill>
                   <a:schemeClr val="tx1"/>
                 </a:solidFill>
@@ -3453,7 +3275,7 @@
               <a:t>rest</a:t>
             </a:r>
             <a:r>
-              <a:rPr lang="es-CO" sz="1200" b="0" i="0" kern="1200" dirty="0" smtClean="0">
+              <a:rPr lang="es-CO" sz="1200" b="0" i="0" kern="1200" dirty="0">
                 <a:solidFill>
                   <a:schemeClr val="tx1"/>
                 </a:solidFill>
@@ -3465,7 +3287,7 @@
               <a:t>, </a:t>
             </a:r>
             <a:r>
-              <a:rPr lang="es-CO" sz="1200" b="0" i="0" kern="1200" dirty="0" err="1" smtClean="0">
+              <a:rPr lang="es-CO" sz="1200" b="0" i="0" kern="1200" dirty="0" err="1">
                 <a:solidFill>
                   <a:schemeClr val="tx1"/>
                 </a:solidFill>
@@ -3477,7 +3299,7 @@
               <a:t>soap</a:t>
             </a:r>
             <a:r>
-              <a:rPr lang="es-CO" sz="1200" b="0" i="0" kern="1200" dirty="0" smtClean="0">
+              <a:rPr lang="es-CO" sz="1200" b="0" i="0" kern="1200" dirty="0">
                 <a:solidFill>
                   <a:schemeClr val="tx1"/>
                 </a:solidFill>
@@ -3486,19 +3308,7 @@
                 <a:ea typeface="+mn-ea"/>
                 <a:cs typeface="+mn-cs"/>
               </a:rPr>
-              <a:t>, otros) haciendo que la arquitectura quede bastante </a:t>
-            </a:r>
-            <a:r>
-              <a:rPr lang="es-CO" sz="1200" b="0" i="0" kern="1200" dirty="0" smtClean="0">
-                <a:solidFill>
-                  <a:schemeClr val="tx1"/>
-                </a:solidFill>
-                <a:effectLst/>
-                <a:latin typeface="+mn-lt"/>
-                <a:ea typeface="+mn-ea"/>
-                <a:cs typeface="+mn-cs"/>
-              </a:rPr>
-              <a:t>complicada.</a:t>
+              <a:t>, otros) haciendo que la arquitectura quede bastante complicada.</a:t>
             </a:r>
           </a:p>
           <a:p>
@@ -3520,25 +3330,13 @@
               <a:defRPr/>
             </a:pPr>
             <a:r>
-              <a:rPr lang="es-CO" b="1" dirty="0" smtClean="0">
+              <a:rPr lang="es-CO" b="1" dirty="0">
                 <a:effectLst/>
               </a:rPr>
-              <a:t>Múltiples </a:t>
-            </a:r>
-            <a:r>
-              <a:rPr lang="es-CO" b="1" dirty="0" smtClean="0">
-                <a:effectLst/>
-              </a:rPr>
-              <a:t>base de </a:t>
-            </a:r>
-            <a:r>
-              <a:rPr lang="es-CO" b="1" dirty="0" smtClean="0">
-                <a:effectLst/>
-              </a:rPr>
-              <a:t>datos: </a:t>
-            </a:r>
-            <a:r>
-              <a:rPr lang="es-CO" sz="1200" b="0" i="0" kern="1200" dirty="0" smtClean="0">
+              <a:t>Múltiples base de datos: </a:t>
+            </a:r>
+            <a:r>
+              <a:rPr lang="es-CO" sz="1200" b="0" i="0" kern="1200" dirty="0">
                 <a:solidFill>
                   <a:schemeClr val="tx1"/>
                 </a:solidFill>
@@ -3547,29 +3345,8 @@
                 <a:ea typeface="+mn-ea"/>
                 <a:cs typeface="+mn-cs"/>
               </a:rPr>
-              <a:t>Si </a:t>
-            </a:r>
-            <a:r>
-              <a:rPr lang="es-CO" sz="1200" b="0" i="0" kern="1200" dirty="0" smtClean="0">
-                <a:solidFill>
-                  <a:schemeClr val="tx1"/>
-                </a:solidFill>
-                <a:effectLst/>
-                <a:latin typeface="+mn-lt"/>
-                <a:ea typeface="+mn-ea"/>
-                <a:cs typeface="+mn-cs"/>
-              </a:rPr>
-              <a:t>cada servicio es independiente de los demás, vamos a tener diferentes bases de datos para cada servicio. Esto trae problemas de varios tipos, como pueden ser problemas de performance para leer datos que estén en diferentes servicios. Como cada servicio se encarga solo de la integridad de sus datos, el manejo de transacciones que afecten mas de un servicio, es responsabilidad de la aplicación (y no de la base de datos) agregando complejidad a la misma. </a:t>
-            </a:r>
-            <a:endParaRPr lang="es-CO" sz="1200" b="0" i="0" kern="1200" dirty="0" smtClean="0">
-              <a:solidFill>
-                <a:schemeClr val="tx1"/>
-              </a:solidFill>
-              <a:effectLst/>
-              <a:latin typeface="+mn-lt"/>
-              <a:ea typeface="+mn-ea"/>
-              <a:cs typeface="+mn-cs"/>
-            </a:endParaRPr>
+              <a:t>Si cada servicio es independiente de los demás, vamos a tener diferentes bases de datos para cada servicio. Esto trae problemas de varios tipos, como pueden ser problemas de performance para leer datos que estén en diferentes servicios. Como cada servicio se encarga solo de la integridad de sus datos, el manejo de transacciones que afecten mas de un servicio, es responsabilidad de la aplicación (y no de la base de datos) agregando complejidad a la misma. </a:t>
+            </a:r>
           </a:p>
           <a:p>
             <a:pPr marL="171450" marR="0" lvl="0" indent="-171450" algn="l" defTabSz="914400" rtl="0" eaLnBrk="1" fontAlgn="auto" latinLnBrk="0" hangingPunct="1">
@@ -3590,23 +3367,17 @@
               <a:defRPr/>
             </a:pPr>
             <a:r>
-              <a:rPr lang="es-CO" b="1" dirty="0" smtClean="0">
+              <a:rPr lang="es-CO" b="1" dirty="0">
                 <a:effectLst/>
               </a:rPr>
-              <a:t>Más</a:t>
-            </a:r>
-            <a:r>
-              <a:rPr lang="es-CO" b="1" dirty="0" smtClean="0">
-                <a:effectLst/>
-              </a:rPr>
-              <a:t> complejo de probar.</a:t>
-            </a:r>
-            <a:r>
-              <a:rPr lang="es-CO" dirty="0" smtClean="0"/>
+              <a:t>Más complejo de probar.</a:t>
+            </a:r>
+            <a:r>
+              <a:rPr lang="es-CO" dirty="0"/>
               <a:t> </a:t>
             </a:r>
             <a:r>
-              <a:rPr lang="es-CO" sz="1200" b="0" i="0" kern="1200" dirty="0" smtClean="0">
+              <a:rPr lang="es-CO" sz="1200" b="0" i="0" kern="1200" dirty="0">
                 <a:solidFill>
                   <a:schemeClr val="tx1"/>
                 </a:solidFill>
@@ -3618,7 +3389,7 @@
               <a:t>Si bien la prueba unitaria dentro de cada servicio es más fácil, la prueba de la aplicación basada en </a:t>
             </a:r>
             <a:r>
-              <a:rPr lang="es-CO" sz="1200" b="0" i="0" kern="1200" dirty="0" err="1" smtClean="0">
+              <a:rPr lang="es-CO" sz="1200" b="0" i="0" kern="1200" dirty="0" err="1">
                 <a:solidFill>
                   <a:schemeClr val="tx1"/>
                 </a:solidFill>
@@ -3630,7 +3401,7 @@
               <a:t>microservicios</a:t>
             </a:r>
             <a:r>
-              <a:rPr lang="es-CO" sz="1200" b="0" i="0" kern="1200" dirty="0" smtClean="0">
+              <a:rPr lang="es-CO" sz="1200" b="0" i="0" kern="1200" dirty="0">
                 <a:solidFill>
                   <a:schemeClr val="tx1"/>
                 </a:solidFill>
@@ -3641,15 +3412,6 @@
               </a:rPr>
               <a:t> es bastante más compleja y necesita de mucha más coordinación y programación. </a:t>
             </a:r>
-            <a:endParaRPr lang="es-CO" sz="1200" b="0" i="0" kern="1200" dirty="0" smtClean="0">
-              <a:solidFill>
-                <a:schemeClr val="tx1"/>
-              </a:solidFill>
-              <a:effectLst/>
-              <a:latin typeface="+mn-lt"/>
-              <a:ea typeface="+mn-ea"/>
-              <a:cs typeface="+mn-cs"/>
-            </a:endParaRPr>
           </a:p>
           <a:p>
             <a:pPr marL="171450" marR="0" lvl="0" indent="-171450" algn="l" defTabSz="914400" rtl="0" eaLnBrk="1" fontAlgn="auto" latinLnBrk="0" hangingPunct="1">
@@ -3670,7 +3432,7 @@
               <a:defRPr/>
             </a:pPr>
             <a:r>
-              <a:rPr lang="es-CO" sz="1200" b="1" i="0" kern="1200" dirty="0" smtClean="0">
+              <a:rPr lang="es-CO" sz="1200" b="1" i="0" kern="1200" dirty="0">
                 <a:solidFill>
                   <a:schemeClr val="tx1"/>
                 </a:solidFill>
@@ -3682,7 +3444,7 @@
               <a:t>Cambios Coordinados: </a:t>
             </a:r>
             <a:r>
-              <a:rPr lang="es-CO" sz="1200" b="0" i="0" kern="1200" dirty="0" smtClean="0">
+              <a:rPr lang="es-CO" sz="1200" b="0" i="0" kern="1200" dirty="0">
                 <a:solidFill>
                   <a:schemeClr val="tx1"/>
                 </a:solidFill>
@@ -3691,31 +3453,7 @@
                 <a:ea typeface="+mn-ea"/>
                 <a:cs typeface="+mn-cs"/>
               </a:rPr>
-              <a:t>Cuando </a:t>
-            </a:r>
-            <a:r>
-              <a:rPr lang="es-CO" sz="1200" b="0" i="0" kern="1200" dirty="0" smtClean="0">
-                <a:solidFill>
-                  <a:schemeClr val="tx1"/>
-                </a:solidFill>
-                <a:effectLst/>
-                <a:latin typeface="+mn-lt"/>
-                <a:ea typeface="+mn-ea"/>
-                <a:cs typeface="+mn-cs"/>
-              </a:rPr>
-              <a:t>se tiene un cambio que involucra a muchos servicios, los mismos deben realizarse en forma coordinada y la instalación también debe hacerse en forma coordinada, agregando costos al proceso de </a:t>
-            </a:r>
-            <a:r>
-              <a:rPr lang="es-CO" sz="1200" b="0" i="0" kern="1200" dirty="0" smtClean="0">
-                <a:solidFill>
-                  <a:schemeClr val="tx1"/>
-                </a:solidFill>
-                <a:effectLst/>
-                <a:latin typeface="+mn-lt"/>
-                <a:ea typeface="+mn-ea"/>
-                <a:cs typeface="+mn-cs"/>
-              </a:rPr>
-              <a:t>instalación.</a:t>
+              <a:t>Cuando se tiene un cambio que involucra a muchos servicios, los mismos deben realizarse en forma coordinada y la instalación también debe hacerse en forma coordinada, agregando costos al proceso de instalación.</a:t>
             </a:r>
           </a:p>
           <a:p>
@@ -3737,31 +3475,25 @@
               <a:defRPr/>
             </a:pPr>
             <a:r>
-              <a:rPr lang="es-CO" b="1" dirty="0" smtClean="0">
+              <a:rPr lang="es-CO" b="1" dirty="0">
                 <a:effectLst/>
               </a:rPr>
               <a:t>Instalación y </a:t>
             </a:r>
             <a:r>
-              <a:rPr lang="es-CO" b="1" dirty="0" err="1" smtClean="0">
+              <a:rPr lang="es-CO" b="1" dirty="0" err="1">
                 <a:effectLst/>
               </a:rPr>
               <a:t>versionamiento</a:t>
             </a:r>
             <a:r>
-              <a:rPr lang="es-CO" b="1" dirty="0" smtClean="0">
+              <a:rPr lang="es-CO" b="1" dirty="0">
                 <a:effectLst/>
               </a:rPr>
-              <a:t> mas complejos para la aplicación: </a:t>
-            </a:r>
-            <a:r>
-              <a:rPr lang="es-CO" b="1" dirty="0" smtClean="0">
-                <a:effectLst/>
-              </a:rPr>
-              <a:t> </a:t>
-            </a:r>
-            <a:r>
-              <a:rPr lang="es-CO" sz="1200" b="0" i="0" kern="1200" dirty="0" smtClean="0">
+              <a:t> mas complejos para la aplicación:  </a:t>
+            </a:r>
+            <a:r>
+              <a:rPr lang="es-CO" sz="1200" b="0" i="0" kern="1200" dirty="0">
                 <a:solidFill>
                   <a:schemeClr val="tx1"/>
                 </a:solidFill>
@@ -3773,7 +3505,7 @@
               <a:t>Al tener muchos servicios, es necesario tener automatizado el proceso pues si no se vuelve inmanejable. Además es mucho mas difícil el saber en que </a:t>
             </a:r>
             <a:r>
-              <a:rPr lang="es-CO" sz="1200" b="0" i="0" kern="1200" dirty="0" err="1" smtClean="0">
+              <a:rPr lang="es-CO" sz="1200" b="0" i="0" kern="1200" dirty="0" err="1">
                 <a:solidFill>
                   <a:schemeClr val="tx1"/>
                 </a:solidFill>
@@ -3785,7 +3517,7 @@
               <a:t>version</a:t>
             </a:r>
             <a:r>
-              <a:rPr lang="es-CO" sz="1200" b="0" i="0" kern="1200" dirty="0" smtClean="0">
+              <a:rPr lang="es-CO" sz="1200" b="0" i="0" kern="1200" dirty="0">
                 <a:solidFill>
                   <a:schemeClr val="tx1"/>
                 </a:solidFill>
@@ -3797,7 +3529,7 @@
               <a:t> esta la </a:t>
             </a:r>
             <a:r>
-              <a:rPr lang="es-CO" sz="1200" b="0" i="0" kern="1200" dirty="0" err="1" smtClean="0">
+              <a:rPr lang="es-CO" sz="1200" b="0" i="0" kern="1200" dirty="0" err="1">
                 <a:solidFill>
                   <a:schemeClr val="tx1"/>
                 </a:solidFill>
@@ -3809,7 +3541,7 @@
               <a:t>aplicacion</a:t>
             </a:r>
             <a:r>
-              <a:rPr lang="es-CO" sz="1200" b="0" i="0" kern="1200" dirty="0" smtClean="0">
+              <a:rPr lang="es-CO" sz="1200" b="0" i="0" kern="1200" dirty="0">
                 <a:solidFill>
                   <a:schemeClr val="tx1"/>
                 </a:solidFill>
@@ -3906,10 +3638,9 @@
           <a:lstStyle/>
           <a:p>
             <a:r>
-              <a:rPr lang="es-CO" dirty="0" smtClean="0"/>
+              <a:rPr lang="es-CO" dirty="0"/>
               <a:t>https://gotopia.tech/bookclub/episodes/moving-to-microservices-with-sam-newman-and-martin-fowler</a:t>
             </a:r>
-            <a:endParaRPr lang="es-CO" dirty="0"/>
           </a:p>
         </p:txBody>
       </p:sp>
@@ -4067,7 +3798,7 @@
           </a:lstStyle>
           <a:p>
             <a:r>
-              <a:rPr lang="en-US" smtClean="0"/>
+              <a:rPr lang="en-US"/>
               <a:t>Click to edit Master title style</a:t>
             </a:r>
             <a:endParaRPr lang="es-CO"/>
@@ -4186,7 +3917,7 @@
           </a:lstStyle>
           <a:p>
             <a:r>
-              <a:rPr lang="en-US" smtClean="0"/>
+              <a:rPr lang="en-US"/>
               <a:t>Click to edit Master subtitle style</a:t>
             </a:r>
             <a:endParaRPr lang="es-CO"/>
@@ -4211,7 +3942,7 @@
             <a:fld id="{42C1F1CB-57C8-46CD-A207-903DDF210919}" type="datetimeFigureOut">
               <a:rPr lang="es-CO" smtClean="0"/>
               <a:pPr/>
-              <a:t>14/03/2022</a:t>
+              <a:t>8/09/2023</a:t>
             </a:fld>
             <a:endParaRPr lang="es-CO" dirty="0"/>
           </a:p>
@@ -4254,7 +3985,7 @@
             <a:fld id="{DA2D89EF-5E01-46FC-80D7-6EE7692A75A6}" type="slidenum">
               <a:rPr lang="es-CO" smtClean="0"/>
               <a:pPr/>
-              <a:t>‹#›</a:t>
+              <a:t>‹Nº›</a:t>
             </a:fld>
             <a:endParaRPr lang="es-CO" dirty="0"/>
           </a:p>
@@ -4385,7 +4116,7 @@
           </a:lstStyle>
           <a:p>
             <a:r>
-              <a:rPr lang="en-US" smtClean="0"/>
+              <a:rPr lang="en-US"/>
               <a:t>Click to edit Master title style</a:t>
             </a:r>
             <a:endParaRPr lang="es-CO"/>
@@ -4504,7 +4235,7 @@
           </a:lstStyle>
           <a:p>
             <a:r>
-              <a:rPr lang="en-US" smtClean="0"/>
+              <a:rPr lang="en-US"/>
               <a:t>Click to edit Master subtitle style</a:t>
             </a:r>
             <a:endParaRPr lang="es-CO"/>
@@ -4529,7 +4260,7 @@
             <a:fld id="{42C1F1CB-57C8-46CD-A207-903DDF210919}" type="datetimeFigureOut">
               <a:rPr lang="es-CO" smtClean="0"/>
               <a:pPr/>
-              <a:t>14/03/2022</a:t>
+              <a:t>8/09/2023</a:t>
             </a:fld>
             <a:endParaRPr lang="es-CO" dirty="0"/>
           </a:p>
@@ -4572,7 +4303,7 @@
             <a:fld id="{DA2D89EF-5E01-46FC-80D7-6EE7692A75A6}" type="slidenum">
               <a:rPr lang="es-CO" smtClean="0"/>
               <a:pPr/>
-              <a:t>‹#›</a:t>
+              <a:t>‹Nº›</a:t>
             </a:fld>
             <a:endParaRPr lang="es-CO" dirty="0"/>
           </a:p>
@@ -4688,7 +4419,7 @@
           <a:lstStyle/>
           <a:p>
             <a:r>
-              <a:rPr lang="en-US" smtClean="0"/>
+              <a:rPr lang="en-US"/>
               <a:t>Click to edit Master title style</a:t>
             </a:r>
             <a:endParaRPr lang="es-CO"/>
@@ -4723,35 +4454,35 @@
           <a:p>
             <a:pPr lvl="0"/>
             <a:r>
-              <a:rPr lang="en-US" smtClean="0"/>
+              <a:rPr lang="en-US"/>
               <a:t>Click to edit Master text styles</a:t>
             </a:r>
           </a:p>
           <a:p>
             <a:pPr lvl="1"/>
             <a:r>
-              <a:rPr lang="en-US" smtClean="0"/>
+              <a:rPr lang="en-US"/>
               <a:t>Second level</a:t>
             </a:r>
           </a:p>
           <a:p>
             <a:pPr lvl="2"/>
             <a:r>
-              <a:rPr lang="en-US" smtClean="0"/>
+              <a:rPr lang="en-US"/>
               <a:t>Third level</a:t>
             </a:r>
           </a:p>
           <a:p>
             <a:pPr lvl="3"/>
             <a:r>
-              <a:rPr lang="en-US" smtClean="0"/>
+              <a:rPr lang="en-US"/>
               <a:t>Fourth level</a:t>
             </a:r>
           </a:p>
           <a:p>
             <a:pPr lvl="4"/>
             <a:r>
-              <a:rPr lang="en-US" smtClean="0"/>
+              <a:rPr lang="en-US"/>
               <a:t>Fifth level</a:t>
             </a:r>
             <a:endParaRPr lang="es-CO" dirty="0"/>
@@ -4776,7 +4507,7 @@
             <a:fld id="{42C1F1CB-57C8-46CD-A207-903DDF210919}" type="datetimeFigureOut">
               <a:rPr lang="es-CO" smtClean="0"/>
               <a:pPr/>
-              <a:t>14/03/2022</a:t>
+              <a:t>8/09/2023</a:t>
             </a:fld>
             <a:endParaRPr lang="es-CO" dirty="0"/>
           </a:p>
@@ -4819,7 +4550,7 @@
             <a:fld id="{DA2D89EF-5E01-46FC-80D7-6EE7692A75A6}" type="slidenum">
               <a:rPr lang="es-CO" smtClean="0"/>
               <a:pPr/>
-              <a:t>‹#›</a:t>
+              <a:t>‹Nº›</a:t>
             </a:fld>
             <a:endParaRPr lang="es-CO" dirty="0"/>
           </a:p>
@@ -4935,7 +4666,7 @@
           <a:lstStyle/>
           <a:p>
             <a:r>
-              <a:rPr lang="en-US" smtClean="0"/>
+              <a:rPr lang="en-US"/>
               <a:t>Click to edit Master title style</a:t>
             </a:r>
             <a:endParaRPr lang="es-CO"/>
@@ -4964,35 +4695,35 @@
           <a:p>
             <a:pPr lvl="0"/>
             <a:r>
-              <a:rPr lang="en-US" smtClean="0"/>
+              <a:rPr lang="en-US"/>
               <a:t>Click to edit Master text styles</a:t>
             </a:r>
           </a:p>
           <a:p>
             <a:pPr lvl="1"/>
             <a:r>
-              <a:rPr lang="en-US" smtClean="0"/>
+              <a:rPr lang="en-US"/>
               <a:t>Second level</a:t>
             </a:r>
           </a:p>
           <a:p>
             <a:pPr lvl="2"/>
             <a:r>
-              <a:rPr lang="en-US" smtClean="0"/>
+              <a:rPr lang="en-US"/>
               <a:t>Third level</a:t>
             </a:r>
           </a:p>
           <a:p>
             <a:pPr lvl="3"/>
             <a:r>
-              <a:rPr lang="en-US" smtClean="0"/>
+              <a:rPr lang="en-US"/>
               <a:t>Fourth level</a:t>
             </a:r>
           </a:p>
           <a:p>
             <a:pPr lvl="4"/>
             <a:r>
-              <a:rPr lang="en-US" smtClean="0"/>
+              <a:rPr lang="en-US"/>
               <a:t>Fifth level</a:t>
             </a:r>
             <a:endParaRPr lang="es-CO"/>
@@ -5017,7 +4748,7 @@
             <a:fld id="{42C1F1CB-57C8-46CD-A207-903DDF210919}" type="datetimeFigureOut">
               <a:rPr lang="es-CO" smtClean="0"/>
               <a:pPr/>
-              <a:t>14/03/2022</a:t>
+              <a:t>8/09/2023</a:t>
             </a:fld>
             <a:endParaRPr lang="es-CO" dirty="0"/>
           </a:p>
@@ -5060,7 +4791,7 @@
             <a:fld id="{DA2D89EF-5E01-46FC-80D7-6EE7692A75A6}" type="slidenum">
               <a:rPr lang="es-CO" smtClean="0"/>
               <a:pPr/>
-              <a:t>‹#›</a:t>
+              <a:t>‹Nº›</a:t>
             </a:fld>
             <a:endParaRPr lang="es-CO" dirty="0"/>
           </a:p>
@@ -5176,7 +4907,7 @@
           <a:lstStyle/>
           <a:p>
             <a:r>
-              <a:rPr lang="en-US" smtClean="0"/>
+              <a:rPr lang="en-US"/>
               <a:t>Click to edit Master title style</a:t>
             </a:r>
             <a:endParaRPr lang="es-CO"/>
@@ -5205,35 +4936,35 @@
           <a:p>
             <a:pPr lvl="0"/>
             <a:r>
-              <a:rPr lang="en-US" smtClean="0"/>
+              <a:rPr lang="en-US"/>
               <a:t>Click to edit Master text styles</a:t>
             </a:r>
           </a:p>
           <a:p>
             <a:pPr lvl="1"/>
             <a:r>
-              <a:rPr lang="en-US" smtClean="0"/>
+              <a:rPr lang="en-US"/>
               <a:t>Second level</a:t>
             </a:r>
           </a:p>
           <a:p>
             <a:pPr lvl="2"/>
             <a:r>
-              <a:rPr lang="en-US" smtClean="0"/>
+              <a:rPr lang="en-US"/>
               <a:t>Third level</a:t>
             </a:r>
           </a:p>
           <a:p>
             <a:pPr lvl="3"/>
             <a:r>
-              <a:rPr lang="en-US" smtClean="0"/>
+              <a:rPr lang="en-US"/>
               <a:t>Fourth level</a:t>
             </a:r>
           </a:p>
           <a:p>
             <a:pPr lvl="4"/>
             <a:r>
-              <a:rPr lang="en-US" smtClean="0"/>
+              <a:rPr lang="en-US"/>
               <a:t>Fifth level</a:t>
             </a:r>
             <a:endParaRPr lang="es-CO"/>
@@ -5258,7 +4989,7 @@
             <a:fld id="{42C1F1CB-57C8-46CD-A207-903DDF210919}" type="datetimeFigureOut">
               <a:rPr lang="es-CO" smtClean="0"/>
               <a:pPr/>
-              <a:t>14/03/2022</a:t>
+              <a:t>8/09/2023</a:t>
             </a:fld>
             <a:endParaRPr lang="es-CO" dirty="0"/>
           </a:p>
@@ -5301,7 +5032,7 @@
             <a:fld id="{DA2D89EF-5E01-46FC-80D7-6EE7692A75A6}" type="slidenum">
               <a:rPr lang="es-CO" smtClean="0"/>
               <a:pPr/>
-              <a:t>‹#›</a:t>
+              <a:t>‹Nº›</a:t>
             </a:fld>
             <a:endParaRPr lang="es-CO" dirty="0"/>
           </a:p>
@@ -5427,7 +5158,7 @@
           <a:lstStyle/>
           <a:p>
             <a:r>
-              <a:rPr lang="en-US" smtClean="0"/>
+              <a:rPr lang="en-US"/>
               <a:t>Click to edit Master title style</a:t>
             </a:r>
             <a:endParaRPr lang="es-CO"/>
@@ -5461,35 +5192,35 @@
           <a:p>
             <a:pPr lvl="0"/>
             <a:r>
-              <a:rPr lang="en-US" smtClean="0"/>
+              <a:rPr lang="en-US"/>
               <a:t>Click to edit Master text styles</a:t>
             </a:r>
           </a:p>
           <a:p>
             <a:pPr lvl="1"/>
             <a:r>
-              <a:rPr lang="en-US" smtClean="0"/>
+              <a:rPr lang="en-US"/>
               <a:t>Second level</a:t>
             </a:r>
           </a:p>
           <a:p>
             <a:pPr lvl="2"/>
             <a:r>
-              <a:rPr lang="en-US" smtClean="0"/>
+              <a:rPr lang="en-US"/>
               <a:t>Third level</a:t>
             </a:r>
           </a:p>
           <a:p>
             <a:pPr lvl="3"/>
             <a:r>
-              <a:rPr lang="en-US" smtClean="0"/>
+              <a:rPr lang="en-US"/>
               <a:t>Fourth level</a:t>
             </a:r>
           </a:p>
           <a:p>
             <a:pPr lvl="4"/>
             <a:r>
-              <a:rPr lang="en-US" smtClean="0"/>
+              <a:rPr lang="en-US"/>
               <a:t>Fifth level</a:t>
             </a:r>
             <a:endParaRPr lang="es-CO" dirty="0"/>
@@ -5532,7 +5263,7 @@
             <a:fld id="{42C1F1CB-57C8-46CD-A207-903DDF210919}" type="datetimeFigureOut">
               <a:rPr lang="es-CO" smtClean="0"/>
               <a:pPr/>
-              <a:t>14/03/2022</a:t>
+              <a:t>8/09/2023</a:t>
             </a:fld>
             <a:endParaRPr lang="es-CO" dirty="0"/>
           </a:p>
@@ -5611,7 +5342,7 @@
             <a:fld id="{DA2D89EF-5E01-46FC-80D7-6EE7692A75A6}" type="slidenum">
               <a:rPr lang="es-CO" smtClean="0"/>
               <a:pPr/>
-              <a:t>‹#›</a:t>
+              <a:t>‹Nº›</a:t>
             </a:fld>
             <a:endParaRPr lang="es-CO" dirty="0"/>
           </a:p>
@@ -5952,7 +5683,7 @@
           <a:lstStyle/>
           <a:p>
             <a:r>
-              <a:rPr lang="es-CO" dirty="0" smtClean="0"/>
+              <a:rPr lang="es-CO" dirty="0"/>
               <a:t>Arquitectura de Aplicaciones </a:t>
             </a:r>
           </a:p>
@@ -5982,11 +5713,11 @@
           <a:lstStyle/>
           <a:p>
             <a:r>
-              <a:rPr lang="es-CO" sz="8000" dirty="0" smtClean="0"/>
+              <a:rPr lang="es-CO" sz="8000" dirty="0"/>
               <a:t>Micro-</a:t>
             </a:r>
             <a:r>
-              <a:rPr lang="es-CO" sz="8000" dirty="0" err="1" smtClean="0"/>
+              <a:rPr lang="es-CO" sz="8000" dirty="0" err="1"/>
               <a:t>Services</a:t>
             </a:r>
             <a:endParaRPr lang="es-CO" sz="8000" dirty="0"/>
@@ -6016,10 +5747,9 @@
           <a:lstStyle/>
           <a:p>
             <a:r>
-              <a:rPr lang="es-CO" dirty="0" smtClean="0"/>
+              <a:rPr lang="es-CO" dirty="0"/>
               <a:t>Julio Cesar Robles Uribe</a:t>
             </a:r>
-            <a:endParaRPr lang="es-CO" dirty="0"/>
           </a:p>
         </p:txBody>
       </p:sp>
@@ -6046,18 +5776,13 @@
           <a:lstStyle/>
           <a:p>
             <a:r>
-              <a:rPr lang="es-CO" sz="1400" dirty="0" smtClean="0">
+              <a:rPr lang="es-CO" sz="1400" dirty="0">
                 <a:solidFill>
                   <a:srgbClr val="0070C0"/>
                 </a:solidFill>
               </a:rPr>
               <a:t>Arquitecto de Soluciones</a:t>
             </a:r>
-            <a:endParaRPr lang="es-CO" sz="1400" dirty="0">
-              <a:solidFill>
-                <a:srgbClr val="0070C0"/>
-              </a:solidFill>
-            </a:endParaRPr>
           </a:p>
         </p:txBody>
       </p:sp>
@@ -6066,13 +5791,6 @@
   <p:clrMapOvr>
     <a:masterClrMapping/>
   </p:clrMapOvr>
-  <p:timing>
-    <p:tnLst>
-      <p:par>
-        <p:cTn id="1" dur="indefinite" restart="never" nodeType="tmRoot"/>
-      </p:par>
-    </p:tnLst>
-  </p:timing>
 </p:sld>
 </file>
 
@@ -6109,10 +5827,9 @@
           <a:lstStyle/>
           <a:p>
             <a:r>
-              <a:rPr lang="es-CO" dirty="0" smtClean="0"/>
+              <a:rPr lang="es-CO" dirty="0"/>
               <a:t>Cuando usar Micro-Servicios</a:t>
             </a:r>
-            <a:endParaRPr lang="es-CO" dirty="0"/>
           </a:p>
         </p:txBody>
       </p:sp>
@@ -6132,19 +5849,19 @@
           <a:lstStyle/>
           <a:p>
             <a:r>
-              <a:rPr lang="en-US" dirty="0" smtClean="0"/>
+              <a:rPr lang="en-US" dirty="0"/>
               <a:t>Los </a:t>
             </a:r>
             <a:r>
-              <a:rPr lang="en-US" dirty="0" err="1" smtClean="0"/>
+              <a:rPr lang="en-US" dirty="0" err="1"/>
               <a:t>microservicios</a:t>
             </a:r>
             <a:r>
-              <a:rPr lang="en-US" dirty="0" smtClean="0"/>
+              <a:rPr lang="en-US" dirty="0"/>
               <a:t> no son un </a:t>
             </a:r>
             <a:r>
-              <a:rPr lang="en-US" dirty="0" err="1" smtClean="0"/>
+              <a:rPr lang="en-US" dirty="0" err="1"/>
               <a:t>interruptor</a:t>
             </a:r>
             <a:endParaRPr lang="es-CO" dirty="0"/>
@@ -6202,13 +5919,6 @@
   <p:clrMapOvr>
     <a:masterClrMapping/>
   </p:clrMapOvr>
-  <p:timing>
-    <p:tnLst>
-      <p:par>
-        <p:cTn id="1" dur="indefinite" restart="never" nodeType="tmRoot"/>
-      </p:par>
-    </p:tnLst>
-  </p:timing>
 </p:sld>
 </file>
 
@@ -6245,10 +5955,9 @@
           <a:lstStyle/>
           <a:p>
             <a:r>
-              <a:rPr lang="es-CO" dirty="0" smtClean="0"/>
+              <a:rPr lang="es-CO" dirty="0"/>
               <a:t>Cuando usar Micro-Servicios</a:t>
             </a:r>
-            <a:endParaRPr lang="es-CO" dirty="0"/>
           </a:p>
         </p:txBody>
       </p:sp>
@@ -6268,22 +5977,22 @@
           <a:lstStyle/>
           <a:p>
             <a:r>
-              <a:rPr lang="en-US" dirty="0" err="1" smtClean="0"/>
+              <a:rPr lang="en-US" dirty="0" err="1"/>
               <a:t>Crecimiento</a:t>
             </a:r>
             <a:r>
-              <a:rPr lang="en-US" dirty="0" smtClean="0"/>
+              <a:rPr lang="en-US" dirty="0"/>
               <a:t>/</a:t>
             </a:r>
             <a:r>
-              <a:rPr lang="en-US" dirty="0" err="1" smtClean="0"/>
+              <a:rPr lang="en-US" dirty="0" err="1"/>
               <a:t>Escalamiento</a:t>
             </a:r>
-            <a:endParaRPr lang="en-US" dirty="0" smtClean="0"/>
-          </a:p>
-          <a:p>
-            <a:r>
-              <a:rPr lang="en-US" dirty="0" err="1" smtClean="0"/>
+            <a:endParaRPr lang="en-US" dirty="0"/>
+          </a:p>
+          <a:p>
+            <a:r>
+              <a:rPr lang="en-US" dirty="0" err="1"/>
               <a:t>Modularidad</a:t>
             </a:r>
             <a:endParaRPr lang="es-CO" dirty="0"/>
@@ -6335,13 +6044,6 @@
   <p:clrMapOvr>
     <a:masterClrMapping/>
   </p:clrMapOvr>
-  <p:timing>
-    <p:tnLst>
-      <p:par>
-        <p:cTn id="1" dur="indefinite" restart="never" nodeType="tmRoot"/>
-      </p:par>
-    </p:tnLst>
-  </p:timing>
 </p:sld>
 </file>
 
@@ -6378,18 +6080,9 @@
           <a:lstStyle/>
           <a:p>
             <a:r>
-              <a:rPr lang="es-CO" dirty="0" smtClean="0"/>
-              <a:t>Cómo </a:t>
-            </a:r>
-            <a:r>
-              <a:rPr lang="es-CO" dirty="0" smtClean="0"/>
-              <a:t>migrar a </a:t>
-            </a:r>
-            <a:r>
-              <a:rPr lang="es-CO" dirty="0" smtClean="0"/>
-              <a:t>Micro-Servicios?</a:t>
-            </a:r>
-            <a:endParaRPr lang="es-CO" dirty="0"/>
+              <a:rPr lang="es-CO" dirty="0"/>
+              <a:t>Cómo migrar a Micro-Servicios?</a:t>
+            </a:r>
           </a:p>
         </p:txBody>
       </p:sp>
@@ -6411,69 +6104,64 @@
           <a:lstStyle/>
           <a:p>
             <a:r>
-              <a:rPr lang="es-CO" dirty="0" smtClean="0"/>
+              <a:rPr lang="es-CO" dirty="0"/>
               <a:t>Identifique</a:t>
             </a:r>
           </a:p>
           <a:p>
             <a:r>
               <a:rPr lang="es-CO" dirty="0"/>
-              <a:t>A</a:t>
-            </a:r>
-            <a:r>
-              <a:rPr lang="es-CO" dirty="0" smtClean="0"/>
-              <a:t>grupe y separe</a:t>
-            </a:r>
-          </a:p>
-          <a:p>
-            <a:r>
-              <a:rPr lang="es-CO" dirty="0" smtClean="0"/>
+              <a:t>Agrupe y separe</a:t>
+            </a:r>
+          </a:p>
+          <a:p>
+            <a:r>
+              <a:rPr lang="es-CO" dirty="0"/>
               <a:t>Nueva Tabla</a:t>
             </a:r>
           </a:p>
           <a:p>
             <a:r>
-              <a:rPr lang="es-CO" dirty="0" smtClean="0"/>
+              <a:rPr lang="es-CO" dirty="0"/>
               <a:t>Nuevo Servicio</a:t>
             </a:r>
           </a:p>
           <a:p>
             <a:r>
-              <a:rPr lang="es-CO" dirty="0" smtClean="0"/>
+              <a:rPr lang="es-CO" dirty="0"/>
               <a:t>Socializar</a:t>
             </a:r>
           </a:p>
           <a:p>
             <a:r>
-              <a:rPr lang="es-CO" dirty="0" smtClean="0"/>
+              <a:rPr lang="es-CO" dirty="0"/>
               <a:t>Nueva Base de datos</a:t>
             </a:r>
           </a:p>
           <a:p>
             <a:r>
-              <a:rPr lang="es-CO" dirty="0" smtClean="0"/>
+              <a:rPr lang="es-CO" dirty="0"/>
               <a:t>Sincronizar</a:t>
             </a:r>
           </a:p>
           <a:p>
             <a:r>
-              <a:rPr lang="es-CO" dirty="0" err="1" smtClean="0"/>
+              <a:rPr lang="es-CO" dirty="0" err="1"/>
               <a:t>Redireccionar</a:t>
             </a:r>
-            <a:endParaRPr lang="es-CO" dirty="0" smtClean="0"/>
-          </a:p>
-          <a:p>
-            <a:r>
-              <a:rPr lang="es-CO" dirty="0" smtClean="0"/>
+            <a:endParaRPr lang="es-CO" dirty="0"/>
+          </a:p>
+          <a:p>
+            <a:r>
+              <a:rPr lang="es-CO" dirty="0"/>
               <a:t>Limpiar</a:t>
             </a:r>
           </a:p>
           <a:p>
             <a:r>
-              <a:rPr lang="es-CO" dirty="0" smtClean="0"/>
+              <a:rPr lang="es-CO" dirty="0"/>
               <a:t>Pruebe y Automatice</a:t>
             </a:r>
-            <a:endParaRPr lang="es-CO" dirty="0"/>
           </a:p>
         </p:txBody>
       </p:sp>
@@ -6524,13 +6212,6 @@
   <p:clrMapOvr>
     <a:masterClrMapping/>
   </p:clrMapOvr>
-  <p:timing>
-    <p:tnLst>
-      <p:par>
-        <p:cTn id="1" dur="indefinite" restart="never" nodeType="tmRoot"/>
-      </p:par>
-    </p:tnLst>
-  </p:timing>
 </p:sld>
 </file>
 
@@ -6567,10 +6248,9 @@
           <a:lstStyle/>
           <a:p>
             <a:r>
-              <a:rPr lang="es-CO" dirty="0" smtClean="0"/>
+              <a:rPr lang="es-CO" dirty="0"/>
               <a:t>Retroalimentación</a:t>
             </a:r>
-            <a:endParaRPr lang="es-CO" dirty="0"/>
           </a:p>
         </p:txBody>
       </p:sp>
@@ -6600,42 +6280,41 @@
               <a:buNone/>
             </a:pPr>
             <a:r>
-              <a:rPr lang="es-CO" b="1" dirty="0" smtClean="0"/>
+              <a:rPr lang="es-CO" b="1" dirty="0"/>
               <a:t>Verdadero o Falso?</a:t>
             </a:r>
           </a:p>
           <a:p>
             <a:pPr lvl="0"/>
             <a:r>
-              <a:rPr lang="es-CO" dirty="0" smtClean="0"/>
+              <a:rPr lang="es-CO" dirty="0"/>
               <a:t>Los </a:t>
             </a:r>
             <a:r>
-              <a:rPr lang="es-CO" dirty="0" err="1" smtClean="0"/>
+              <a:rPr lang="es-CO" dirty="0" err="1"/>
               <a:t>microservicios</a:t>
             </a:r>
             <a:r>
-              <a:rPr lang="es-CO" dirty="0" smtClean="0"/>
+              <a:rPr lang="es-CO" dirty="0"/>
               <a:t> son pequeñas </a:t>
             </a:r>
             <a:r>
-              <a:rPr lang="es-CO" dirty="0" err="1" smtClean="0"/>
+              <a:rPr lang="es-CO" dirty="0" err="1"/>
               <a:t>APIs</a:t>
             </a:r>
             <a:r>
-              <a:rPr lang="es-CO" dirty="0" smtClean="0"/>
+              <a:rPr lang="es-CO" dirty="0"/>
               <a:t> que se comunican entre si.</a:t>
             </a:r>
-            <a:endParaRPr lang="es-CO" dirty="0" smtClean="0"/>
           </a:p>
           <a:p>
             <a:pPr lvl="1"/>
             <a:r>
-              <a:rPr lang="es-CO" b="1" dirty="0" smtClean="0"/>
+              <a:rPr lang="es-CO" b="1" dirty="0"/>
               <a:t>R/ </a:t>
             </a:r>
             <a:r>
-              <a:rPr lang="es-CO" b="1" dirty="0" smtClean="0">
+              <a:rPr lang="es-CO" b="1" dirty="0">
                 <a:solidFill>
                   <a:srgbClr val="C00000"/>
                 </a:solidFill>
@@ -6643,64 +6322,56 @@
               <a:t>Falso</a:t>
             </a:r>
             <a:r>
-              <a:rPr lang="es-CO" b="1" dirty="0" smtClean="0"/>
+              <a:rPr lang="es-CO" b="1" dirty="0"/>
               <a:t>:</a:t>
             </a:r>
             <a:r>
-              <a:rPr lang="es-CO" dirty="0" smtClean="0"/>
+              <a:rPr lang="es-CO" dirty="0"/>
               <a:t> Deben ser servicios independientes que se comunican por medio de </a:t>
             </a:r>
             <a:r>
-              <a:rPr lang="es-CO" dirty="0" err="1" smtClean="0"/>
+              <a:rPr lang="es-CO" dirty="0" err="1"/>
               <a:t>APIs</a:t>
             </a:r>
             <a:r>
-              <a:rPr lang="es-CO" dirty="0" smtClean="0"/>
+              <a:rPr lang="es-CO" dirty="0"/>
               <a:t> bien definidas, ya que puedo tener </a:t>
             </a:r>
             <a:r>
-              <a:rPr lang="es-CO" dirty="0" err="1" smtClean="0"/>
+              <a:rPr lang="es-CO" dirty="0" err="1"/>
               <a:t>multiples</a:t>
             </a:r>
             <a:r>
-              <a:rPr lang="es-CO" dirty="0" smtClean="0"/>
-              <a:t> APIS en diferentes partes pero no necesariamente se comportan como </a:t>
-            </a:r>
-            <a:r>
-              <a:rPr lang="es-CO" dirty="0" smtClean="0"/>
-              <a:t>un servicio independiente.</a:t>
+              <a:rPr lang="es-CO" dirty="0"/>
+              <a:t> APIS en diferentes partes pero no necesariamente se comportan como un servicio independiente.</a:t>
             </a:r>
           </a:p>
           <a:p>
             <a:pPr marL="914400" lvl="2" indent="0">
               <a:buNone/>
             </a:pPr>
-            <a:endParaRPr lang="es-CO" dirty="0" smtClean="0"/>
+            <a:endParaRPr lang="es-CO" dirty="0"/>
           </a:p>
           <a:p>
             <a:pPr lvl="0"/>
             <a:r>
-              <a:rPr lang="es-CO" dirty="0" smtClean="0"/>
+              <a:rPr lang="es-CO" dirty="0"/>
               <a:t>Inicialmente los monolitos son mas fáciles de desarrollar que los </a:t>
             </a:r>
             <a:r>
-              <a:rPr lang="es-CO" dirty="0" err="1" smtClean="0"/>
+              <a:rPr lang="es-CO" dirty="0" err="1"/>
               <a:t>microservicios</a:t>
             </a:r>
-            <a:endParaRPr lang="es-CO" dirty="0" smtClean="0"/>
+            <a:endParaRPr lang="es-CO" dirty="0"/>
           </a:p>
           <a:p>
             <a:pPr lvl="1"/>
             <a:r>
-              <a:rPr lang="es-CO" b="1" dirty="0" smtClean="0"/>
-              <a:t>R </a:t>
-            </a:r>
-            <a:r>
-              <a:rPr lang="es-CO" b="1" dirty="0" smtClean="0"/>
-              <a:t>/</a:t>
-            </a:r>
-            <a:r>
-              <a:rPr lang="es-CO" b="1" dirty="0" smtClean="0">
+              <a:rPr lang="es-CO" b="1" dirty="0"/>
+              <a:t>R /</a:t>
+            </a:r>
+            <a:r>
+              <a:rPr lang="es-CO" b="1" dirty="0">
                 <a:solidFill>
                   <a:srgbClr val="00B050"/>
                 </a:solidFill>
@@ -6708,50 +6379,45 @@
               <a:t>Verdadero</a:t>
             </a:r>
             <a:r>
-              <a:rPr lang="es-CO" b="1" dirty="0" smtClean="0"/>
+              <a:rPr lang="es-CO" b="1" dirty="0"/>
               <a:t>: </a:t>
             </a:r>
             <a:r>
-              <a:rPr lang="es-CO" dirty="0" err="1" smtClean="0"/>
+              <a:rPr lang="es-CO" dirty="0" err="1"/>
               <a:t>Inicial,emmente</a:t>
             </a:r>
             <a:r>
-              <a:rPr lang="es-CO" dirty="0" smtClean="0"/>
-              <a:t> y </a:t>
-            </a:r>
-            <a:r>
-              <a:rPr lang="es-CO" dirty="0" smtClean="0"/>
-              <a:t>cuando son funcionalidades pequeñas un monolito puede ser mas fácil de desarrollar, el problema se da cuando la funcionalidad crece y se requiere escalar.</a:t>
+              <a:rPr lang="es-CO" dirty="0"/>
+              <a:t> y cuando son funcionalidades pequeñas un monolito puede ser mas fácil de desarrollar, el problema se da cuando la funcionalidad crece y se requiere escalar.</a:t>
             </a:r>
           </a:p>
           <a:p>
             <a:pPr lvl="1"/>
-            <a:endParaRPr lang="es-CO" dirty="0" smtClean="0"/>
+            <a:endParaRPr lang="es-CO" dirty="0"/>
           </a:p>
           <a:p>
             <a:pPr lvl="0"/>
             <a:r>
-              <a:rPr lang="es-CO" dirty="0" smtClean="0"/>
+              <a:rPr lang="es-CO" dirty="0"/>
               <a:t>El uso de los </a:t>
             </a:r>
             <a:r>
-              <a:rPr lang="es-CO" dirty="0" err="1" smtClean="0"/>
+              <a:rPr lang="es-CO" dirty="0" err="1"/>
               <a:t>microservicios</a:t>
             </a:r>
             <a:r>
-              <a:rPr lang="es-CO" dirty="0" smtClean="0"/>
+              <a:rPr lang="es-CO" dirty="0"/>
               <a:t> facilitan las actualizaciones</a:t>
             </a:r>
-            <a:endParaRPr lang="es-CO" dirty="0" smtClean="0"/>
           </a:p>
           <a:p>
             <a:pPr lvl="1"/>
             <a:r>
-              <a:rPr lang="es-CO" b="1" dirty="0" smtClean="0"/>
+              <a:rPr lang="es-CO" b="1" dirty="0"/>
               <a:t>R/ </a:t>
             </a:r>
             <a:r>
-              <a:rPr lang="es-CO" b="1" dirty="0" smtClean="0">
+              <a:rPr lang="es-CO" b="1" dirty="0">
                 <a:solidFill>
                   <a:srgbClr val="00B050"/>
                 </a:solidFill>
@@ -6759,42 +6425,41 @@
               <a:t>Verdadero</a:t>
             </a:r>
             <a:r>
-              <a:rPr lang="es-CO" b="1" dirty="0" smtClean="0"/>
+              <a:rPr lang="es-CO" b="1" dirty="0"/>
               <a:t>: </a:t>
             </a:r>
             <a:r>
-              <a:rPr lang="es-CO" dirty="0" smtClean="0"/>
+              <a:rPr lang="es-CO" dirty="0"/>
               <a:t>al tener los </a:t>
             </a:r>
             <a:r>
-              <a:rPr lang="es-CO" dirty="0" err="1" smtClean="0"/>
+              <a:rPr lang="es-CO" dirty="0" err="1"/>
               <a:t>modulos</a:t>
             </a:r>
             <a:r>
-              <a:rPr lang="es-CO" dirty="0" smtClean="0"/>
+              <a:rPr lang="es-CO" dirty="0"/>
               <a:t> independientes no es necesario para toda la aplicación para actualizar un solo modulo..</a:t>
             </a:r>
-            <a:endParaRPr lang="es-CO" dirty="0" smtClean="0"/>
           </a:p>
           <a:p>
             <a:pPr lvl="1"/>
-            <a:endParaRPr lang="es-CO" dirty="0" smtClean="0"/>
+            <a:endParaRPr lang="es-CO" dirty="0"/>
           </a:p>
           <a:p>
             <a:pPr lvl="0"/>
             <a:r>
-              <a:rPr lang="es-CO" dirty="0" smtClean="0"/>
+              <a:rPr lang="es-CO" dirty="0"/>
               <a:t>Las aplicaciones monolíticas tiene un arranque más rápido por tener todo integrado</a:t>
             </a:r>
           </a:p>
           <a:p>
             <a:pPr lvl="1"/>
             <a:r>
-              <a:rPr lang="es-CO" b="1" dirty="0" smtClean="0"/>
+              <a:rPr lang="es-CO" b="1" dirty="0"/>
               <a:t>R/ </a:t>
             </a:r>
             <a:r>
-              <a:rPr lang="es-CO" b="1" dirty="0" smtClean="0">
+              <a:rPr lang="es-CO" b="1" dirty="0">
                 <a:solidFill>
                   <a:srgbClr val="FF0000"/>
                 </a:solidFill>
@@ -6802,50 +6467,49 @@
               <a:t>Falso</a:t>
             </a:r>
             <a:r>
-              <a:rPr lang="es-CO" b="1" dirty="0" smtClean="0"/>
+              <a:rPr lang="es-CO" b="1" dirty="0"/>
               <a:t>: </a:t>
             </a:r>
             <a:r>
-              <a:rPr lang="es-CO" dirty="0" smtClean="0"/>
+              <a:rPr lang="es-CO" dirty="0"/>
               <a:t>El tener demasiados componentes internos hace que se requiera inicializarlos antes de tener a punto toda la aplicación, lo que puede </a:t>
             </a:r>
             <a:r>
-              <a:rPr lang="es-CO" dirty="0" err="1" smtClean="0"/>
+              <a:rPr lang="es-CO" dirty="0" err="1"/>
               <a:t>relentizar</a:t>
             </a:r>
             <a:r>
-              <a:rPr lang="es-CO" dirty="0" smtClean="0"/>
+              <a:rPr lang="es-CO" dirty="0"/>
               <a:t> su carga inicial.</a:t>
             </a:r>
           </a:p>
           <a:p>
             <a:pPr lvl="1"/>
-            <a:endParaRPr lang="es-CO" dirty="0" smtClean="0"/>
+            <a:endParaRPr lang="es-CO" dirty="0"/>
           </a:p>
           <a:p>
             <a:pPr lvl="0"/>
             <a:r>
-              <a:rPr lang="es-CO" dirty="0" smtClean="0"/>
+              <a:rPr lang="es-CO" dirty="0"/>
               <a:t>Los </a:t>
             </a:r>
             <a:r>
-              <a:rPr lang="es-CO" dirty="0" err="1" smtClean="0"/>
+              <a:rPr lang="es-CO" dirty="0" err="1"/>
               <a:t>microservicios</a:t>
             </a:r>
             <a:r>
-              <a:rPr lang="es-CO" dirty="0" smtClean="0"/>
+              <a:rPr lang="es-CO" dirty="0"/>
               <a:t> requieren bases de datos independientes.</a:t>
             </a:r>
-            <a:endParaRPr lang="es-CO" dirty="0" smtClean="0"/>
           </a:p>
           <a:p>
             <a:pPr lvl="1"/>
             <a:r>
-              <a:rPr lang="es-CO" b="1" dirty="0" smtClean="0"/>
+              <a:rPr lang="es-CO" b="1" dirty="0"/>
               <a:t>R/ </a:t>
             </a:r>
             <a:r>
-              <a:rPr lang="es-CO" b="1" dirty="0" smtClean="0">
+              <a:rPr lang="es-CO" b="1" dirty="0">
                 <a:solidFill>
                   <a:srgbClr val="00B050"/>
                 </a:solidFill>
@@ -6853,30 +6517,29 @@
               <a:t>Verdadero</a:t>
             </a:r>
             <a:r>
-              <a:rPr lang="es-CO" b="1" dirty="0" smtClean="0"/>
+              <a:rPr lang="es-CO" b="1" dirty="0"/>
               <a:t>: </a:t>
             </a:r>
             <a:r>
-              <a:rPr lang="es-CO" dirty="0" smtClean="0"/>
+              <a:rPr lang="es-CO" dirty="0"/>
               <a:t>Parte del proceso de </a:t>
             </a:r>
             <a:r>
-              <a:rPr lang="es-CO" dirty="0" err="1" smtClean="0"/>
+              <a:rPr lang="es-CO" dirty="0" err="1"/>
               <a:t>tner</a:t>
             </a:r>
             <a:r>
-              <a:rPr lang="es-CO" dirty="0" smtClean="0"/>
+              <a:rPr lang="es-CO" dirty="0"/>
               <a:t> un </a:t>
             </a:r>
             <a:r>
-              <a:rPr lang="es-CO" dirty="0" err="1" smtClean="0"/>
+              <a:rPr lang="es-CO" dirty="0" err="1"/>
               <a:t>microservicio</a:t>
             </a:r>
             <a:r>
-              <a:rPr lang="es-CO" dirty="0" smtClean="0"/>
+              <a:rPr lang="es-CO" dirty="0"/>
               <a:t> es ser autónomo, tanto en procesamiento como en datos.</a:t>
             </a:r>
-            <a:endParaRPr lang="es-CO" dirty="0" smtClean="0"/>
           </a:p>
         </p:txBody>
       </p:sp>
@@ -7441,10 +7104,9 @@
           <a:lstStyle/>
           <a:p>
             <a:r>
-              <a:rPr lang="es-CO" dirty="0" smtClean="0"/>
+              <a:rPr lang="es-CO" dirty="0"/>
               <a:t>Retroalimentación</a:t>
             </a:r>
-            <a:endParaRPr lang="es-CO" dirty="0"/>
           </a:p>
         </p:txBody>
       </p:sp>
@@ -7474,38 +7136,25 @@
               <a:buNone/>
             </a:pPr>
             <a:r>
-              <a:rPr lang="es-CO" b="1" dirty="0" smtClean="0"/>
+              <a:rPr lang="es-CO" b="1" dirty="0"/>
               <a:t>Verdadero o Falso?</a:t>
             </a:r>
           </a:p>
           <a:p>
             <a:pPr lvl="0"/>
             <a:r>
-              <a:rPr lang="es-CO" dirty="0" smtClean="0"/>
-              <a:t>Los </a:t>
-            </a:r>
-            <a:r>
-              <a:rPr lang="es-CO" dirty="0" smtClean="0"/>
-              <a:t>monolitos </a:t>
-            </a:r>
-            <a:r>
-              <a:rPr lang="es-CO" dirty="0" smtClean="0"/>
-              <a:t>tiene un lenguaje unificado</a:t>
-            </a:r>
-            <a:r>
-              <a:rPr lang="es-CO" dirty="0" smtClean="0"/>
-              <a:t>.</a:t>
-            </a:r>
-            <a:endParaRPr lang="es-CO" dirty="0" smtClean="0"/>
+              <a:rPr lang="es-CO" dirty="0"/>
+              <a:t>Los monolitos tiene un lenguaje unificado.</a:t>
+            </a:r>
           </a:p>
           <a:p>
             <a:pPr lvl="1"/>
             <a:r>
-              <a:rPr lang="es-CO" b="1" dirty="0" smtClean="0"/>
+              <a:rPr lang="es-CO" b="1" dirty="0"/>
               <a:t>R/ </a:t>
             </a:r>
             <a:r>
-              <a:rPr lang="es-CO" b="1" dirty="0" smtClean="0">
+              <a:rPr lang="es-CO" b="1" dirty="0">
                 <a:solidFill>
                   <a:srgbClr val="00B050"/>
                 </a:solidFill>
@@ -7513,328 +7162,20 @@
               <a:t>Verdadero</a:t>
             </a:r>
             <a:r>
-              <a:rPr lang="es-CO" b="1" dirty="0" smtClean="0"/>
+              <a:rPr lang="es-CO" b="1" dirty="0"/>
               <a:t>:</a:t>
             </a:r>
             <a:r>
-              <a:rPr lang="es-CO" dirty="0" smtClean="0"/>
-              <a:t> </a:t>
-            </a:r>
-            <a:r>
-              <a:rPr lang="es-CO" dirty="0" smtClean="0"/>
-              <a:t>Los </a:t>
-            </a:r>
-            <a:r>
-              <a:rPr lang="es-CO" dirty="0" smtClean="0"/>
-              <a:t>monolitos se desarrollan, básicamente, bajo la misma </a:t>
-            </a:r>
-            <a:r>
-              <a:rPr lang="es-CO" dirty="0" err="1" smtClean="0"/>
+              <a:rPr lang="es-CO" dirty="0"/>
+              <a:t> Los monolitos se desarrollan, básicamente, bajo la misma </a:t>
+            </a:r>
+            <a:r>
+              <a:rPr lang="es-CO" dirty="0" err="1"/>
               <a:t>aquitectura</a:t>
             </a:r>
             <a:r>
-              <a:rPr lang="es-CO" dirty="0" smtClean="0"/>
+              <a:rPr lang="es-CO" dirty="0"/>
               <a:t> y bajo el mismo lenguaje unificado.</a:t>
-            </a:r>
-          </a:p>
-          <a:p>
-            <a:pPr lvl="1"/>
-            <a:endParaRPr lang="es-CO" dirty="0" smtClean="0"/>
-          </a:p>
-          <a:p>
-            <a:pPr lvl="0"/>
-            <a:r>
-              <a:rPr lang="es-CO" dirty="0" smtClean="0"/>
-              <a:t>Los </a:t>
-            </a:r>
-            <a:r>
-              <a:rPr lang="es-CO" dirty="0" err="1" smtClean="0"/>
-              <a:t>microservicios</a:t>
-            </a:r>
-            <a:r>
-              <a:rPr lang="es-CO" dirty="0" smtClean="0"/>
-              <a:t> son mas fáciles de </a:t>
-            </a:r>
-            <a:r>
-              <a:rPr lang="es-CO" dirty="0" err="1" smtClean="0"/>
-              <a:t>probrar</a:t>
-            </a:r>
-            <a:endParaRPr lang="es-CO" dirty="0" smtClean="0"/>
-          </a:p>
-          <a:p>
-            <a:pPr lvl="1"/>
-            <a:r>
-              <a:rPr lang="es-CO" b="1" dirty="0" smtClean="0"/>
-              <a:t>R/ </a:t>
-            </a:r>
-            <a:r>
-              <a:rPr lang="es-CO" b="1" dirty="0" smtClean="0">
-                <a:solidFill>
-                  <a:srgbClr val="00B050"/>
-                </a:solidFill>
-              </a:rPr>
-              <a:t>Verdadero</a:t>
-            </a:r>
-            <a:r>
-              <a:rPr lang="es-CO" b="1" dirty="0" smtClean="0"/>
-              <a:t>: </a:t>
-            </a:r>
-            <a:r>
-              <a:rPr lang="es-CO" dirty="0" smtClean="0"/>
-              <a:t>Al tener funcionalidades especificas son mas fáciles de </a:t>
-            </a:r>
-            <a:r>
-              <a:rPr lang="es-CO" dirty="0" err="1" smtClean="0"/>
-              <a:t>probrar</a:t>
-            </a:r>
-            <a:r>
-              <a:rPr lang="es-CO" dirty="0" smtClean="0"/>
-              <a:t> de </a:t>
-            </a:r>
-            <a:r>
-              <a:rPr lang="es-CO" dirty="0" err="1" smtClean="0"/>
-              <a:t>ofrma</a:t>
-            </a:r>
-            <a:r>
-              <a:rPr lang="es-CO" dirty="0" smtClean="0"/>
-              <a:t> unitaria, pero no en el contexto general de la aplicación global.</a:t>
-            </a:r>
-          </a:p>
-          <a:p>
-            <a:pPr lvl="1"/>
-            <a:endParaRPr lang="es-CO" dirty="0" smtClean="0"/>
-          </a:p>
-          <a:p>
-            <a:pPr lvl="0"/>
-            <a:r>
-              <a:rPr lang="es-CO" dirty="0" smtClean="0"/>
-              <a:t>Los </a:t>
-            </a:r>
-            <a:r>
-              <a:rPr lang="es-CO" dirty="0" smtClean="0"/>
-              <a:t>monolitos se escalan mas fácilmente que los </a:t>
-            </a:r>
-            <a:r>
-              <a:rPr lang="es-CO" dirty="0" err="1" smtClean="0"/>
-              <a:t>microservicios</a:t>
-            </a:r>
-            <a:r>
-              <a:rPr lang="es-CO" dirty="0" smtClean="0"/>
-              <a:t>.</a:t>
-            </a:r>
-            <a:endParaRPr lang="es-CO" dirty="0" smtClean="0"/>
-          </a:p>
-          <a:p>
-            <a:pPr lvl="1"/>
-            <a:r>
-              <a:rPr lang="es-CO" b="1" dirty="0" smtClean="0"/>
-              <a:t>R/ </a:t>
-            </a:r>
-            <a:r>
-              <a:rPr lang="es-CO" b="1" dirty="0" smtClean="0">
-                <a:solidFill>
-                  <a:srgbClr val="FF0000"/>
-                </a:solidFill>
-              </a:rPr>
-              <a:t>Falso</a:t>
-            </a:r>
-            <a:r>
-              <a:rPr lang="es-CO" b="1" dirty="0" smtClean="0"/>
-              <a:t>: </a:t>
-            </a:r>
-            <a:r>
-              <a:rPr lang="es-CO" dirty="0" smtClean="0"/>
-              <a:t>Aunque escalar un monolito es solo instanciar una nueva </a:t>
-            </a:r>
-            <a:r>
-              <a:rPr lang="es-CO" dirty="0" err="1" smtClean="0"/>
-              <a:t>maquna</a:t>
-            </a:r>
-            <a:r>
-              <a:rPr lang="es-CO" dirty="0" smtClean="0"/>
-              <a:t>, se debe garantizar que el nuevo usuario </a:t>
-            </a:r>
-            <a:r>
-              <a:rPr lang="es-CO" dirty="0" err="1" smtClean="0"/>
-              <a:t>continue</a:t>
-            </a:r>
-            <a:r>
-              <a:rPr lang="es-CO" dirty="0" smtClean="0"/>
-              <a:t> su sesión en la nueva instancia.</a:t>
-            </a:r>
-          </a:p>
-          <a:p>
-            <a:pPr lvl="1"/>
-            <a:endParaRPr lang="es-CO" dirty="0" smtClean="0"/>
-          </a:p>
-          <a:p>
-            <a:pPr lvl="0"/>
-            <a:r>
-              <a:rPr lang="es-CO" dirty="0" smtClean="0"/>
-              <a:t>Los </a:t>
-            </a:r>
-            <a:r>
-              <a:rPr lang="es-CO" dirty="0" err="1" smtClean="0"/>
-              <a:t>microservicios</a:t>
-            </a:r>
-            <a:r>
-              <a:rPr lang="es-CO" dirty="0" smtClean="0"/>
-              <a:t> hacen mas complejo la pruebas funcionales de la </a:t>
-            </a:r>
-            <a:r>
-              <a:rPr lang="es-CO" dirty="0" err="1" smtClean="0"/>
-              <a:t>apliación</a:t>
-            </a:r>
-            <a:r>
-              <a:rPr lang="es-CO" dirty="0" smtClean="0"/>
-              <a:t>.</a:t>
-            </a:r>
-            <a:endParaRPr lang="es-CO" dirty="0" smtClean="0"/>
-          </a:p>
-          <a:p>
-            <a:pPr lvl="1"/>
-            <a:r>
-              <a:rPr lang="es-CO" b="1" dirty="0" smtClean="0"/>
-              <a:t>R/ </a:t>
-            </a:r>
-            <a:r>
-              <a:rPr lang="es-CO" b="1" dirty="0" smtClean="0">
-                <a:solidFill>
-                  <a:srgbClr val="00B050"/>
-                </a:solidFill>
-              </a:rPr>
-              <a:t>Verdadero</a:t>
-            </a:r>
-            <a:r>
-              <a:rPr lang="es-CO" b="1" dirty="0" smtClean="0"/>
-              <a:t>: </a:t>
-            </a:r>
-            <a:r>
-              <a:rPr lang="es-CO" b="1" dirty="0" smtClean="0"/>
-              <a:t>E</a:t>
-            </a:r>
-            <a:r>
-              <a:rPr lang="es-CO" dirty="0" smtClean="0"/>
-              <a:t>l </a:t>
-            </a:r>
-            <a:r>
-              <a:rPr lang="es-CO" dirty="0" err="1" smtClean="0"/>
-              <a:t>tner</a:t>
-            </a:r>
-            <a:r>
-              <a:rPr lang="es-CO" dirty="0" smtClean="0"/>
-              <a:t> </a:t>
-            </a:r>
-            <a:r>
-              <a:rPr lang="es-CO" dirty="0" err="1" smtClean="0"/>
-              <a:t>multiples</a:t>
-            </a:r>
-            <a:r>
-              <a:rPr lang="es-CO" dirty="0" smtClean="0"/>
-              <a:t> </a:t>
-            </a:r>
-            <a:r>
-              <a:rPr lang="es-CO" dirty="0" err="1" smtClean="0"/>
-              <a:t>microservicios</a:t>
-            </a:r>
-            <a:r>
-              <a:rPr lang="es-CO" dirty="0" smtClean="0"/>
-              <a:t> que </a:t>
-            </a:r>
-            <a:r>
-              <a:rPr lang="es-CO" dirty="0" err="1" smtClean="0"/>
-              <a:t>componene</a:t>
-            </a:r>
-            <a:r>
-              <a:rPr lang="es-CO" dirty="0" smtClean="0"/>
-              <a:t> toda la aplicación, realizar una prueba funcional que involucre muchos </a:t>
-            </a:r>
-            <a:r>
-              <a:rPr lang="es-CO" dirty="0" err="1" smtClean="0"/>
-              <a:t>microservicios</a:t>
-            </a:r>
-            <a:r>
-              <a:rPr lang="es-CO" dirty="0" smtClean="0"/>
-              <a:t> puede ser mas complejo que hacerlo en </a:t>
-            </a:r>
-            <a:r>
-              <a:rPr lang="es-CO" dirty="0" err="1" smtClean="0"/>
-              <a:t>unmonolito</a:t>
-            </a:r>
-            <a:r>
-              <a:rPr lang="es-CO" dirty="0" smtClean="0"/>
-              <a:t>.</a:t>
-            </a:r>
-          </a:p>
-          <a:p>
-            <a:pPr lvl="1"/>
-            <a:endParaRPr lang="es-CO" dirty="0" smtClean="0"/>
-          </a:p>
-          <a:p>
-            <a:pPr lvl="0"/>
-            <a:r>
-              <a:rPr lang="es-CO" dirty="0" smtClean="0"/>
-              <a:t>El </a:t>
-            </a:r>
-            <a:r>
-              <a:rPr lang="es-CO" dirty="0" err="1" smtClean="0"/>
-              <a:t>versionamiento</a:t>
-            </a:r>
-            <a:r>
-              <a:rPr lang="es-CO" dirty="0" smtClean="0"/>
-              <a:t> de </a:t>
-            </a:r>
-            <a:r>
-              <a:rPr lang="es-CO" dirty="0" err="1" smtClean="0"/>
-              <a:t>microservicios</a:t>
-            </a:r>
-            <a:r>
-              <a:rPr lang="es-CO" dirty="0" smtClean="0"/>
-              <a:t> es más sencillo que el de una aplicación </a:t>
-            </a:r>
-            <a:r>
-              <a:rPr lang="es-CO" dirty="0" err="1" smtClean="0"/>
-              <a:t>monolitica</a:t>
-            </a:r>
-            <a:endParaRPr lang="es-CO" dirty="0" smtClean="0"/>
-          </a:p>
-          <a:p>
-            <a:pPr lvl="1"/>
-            <a:r>
-              <a:rPr lang="es-CO" b="1" dirty="0" smtClean="0"/>
-              <a:t>R/ </a:t>
-            </a:r>
-            <a:r>
-              <a:rPr lang="es-CO" b="1" dirty="0" smtClean="0">
-                <a:solidFill>
-                  <a:srgbClr val="FF0000"/>
-                </a:solidFill>
-              </a:rPr>
-              <a:t>Falso</a:t>
-            </a:r>
-            <a:r>
-              <a:rPr lang="es-CO" b="1" dirty="0" smtClean="0"/>
-              <a:t>: </a:t>
-            </a:r>
-            <a:r>
-              <a:rPr lang="es-CO" dirty="0" smtClean="0"/>
-              <a:t>El uso de </a:t>
-            </a:r>
-            <a:r>
-              <a:rPr lang="es-CO" dirty="0" err="1" smtClean="0"/>
-              <a:t>microservicios</a:t>
-            </a:r>
-            <a:r>
-              <a:rPr lang="es-CO" dirty="0" smtClean="0"/>
-              <a:t>, puede hacer mas complejo el </a:t>
-            </a:r>
-            <a:r>
-              <a:rPr lang="es-CO" dirty="0" err="1" smtClean="0"/>
-              <a:t>versionamiento</a:t>
-            </a:r>
-            <a:r>
-              <a:rPr lang="es-CO" dirty="0" smtClean="0"/>
-              <a:t> de toda la aplicación pues cada servicio cambia o se versiona de manera independiente y en algunos casos sin afectar la funcionalidad de la aplicación general.</a:t>
             </a:r>
           </a:p>
           <a:p>
@@ -7844,31 +7185,321 @@
           <a:p>
             <a:pPr lvl="0"/>
             <a:r>
-              <a:rPr lang="es-CO" dirty="0" smtClean="0"/>
+              <a:rPr lang="es-CO" dirty="0"/>
+              <a:t>Los </a:t>
+            </a:r>
+            <a:r>
+              <a:rPr lang="es-CO" dirty="0" err="1"/>
+              <a:t>microservicios</a:t>
+            </a:r>
+            <a:r>
+              <a:rPr lang="es-CO" dirty="0"/>
+              <a:t> son mas fáciles de </a:t>
+            </a:r>
+            <a:r>
+              <a:rPr lang="es-CO" dirty="0" err="1"/>
+              <a:t>probrar</a:t>
+            </a:r>
+            <a:endParaRPr lang="es-CO" dirty="0"/>
+          </a:p>
+          <a:p>
+            <a:pPr lvl="1"/>
+            <a:r>
+              <a:rPr lang="es-CO" b="1" dirty="0"/>
+              <a:t>R/ </a:t>
+            </a:r>
+            <a:r>
+              <a:rPr lang="es-CO" b="1" dirty="0">
+                <a:solidFill>
+                  <a:srgbClr val="00B050"/>
+                </a:solidFill>
+              </a:rPr>
+              <a:t>Verdadero</a:t>
+            </a:r>
+            <a:r>
+              <a:rPr lang="es-CO" b="1" dirty="0"/>
+              <a:t>: </a:t>
+            </a:r>
+            <a:r>
+              <a:rPr lang="es-CO" dirty="0"/>
+              <a:t>Al tener funcionalidades especificas son mas fáciles de </a:t>
+            </a:r>
+            <a:r>
+              <a:rPr lang="es-CO" dirty="0" err="1"/>
+              <a:t>probrar</a:t>
+            </a:r>
+            <a:r>
+              <a:rPr lang="es-CO" dirty="0"/>
+              <a:t> de </a:t>
+            </a:r>
+            <a:r>
+              <a:rPr lang="es-CO" dirty="0" err="1"/>
+              <a:t>ofrma</a:t>
+            </a:r>
+            <a:r>
+              <a:rPr lang="es-CO" dirty="0"/>
+              <a:t> unitaria, pero no en el contexto general de la aplicación global.</a:t>
+            </a:r>
+          </a:p>
+          <a:p>
+            <a:pPr lvl="1"/>
+            <a:endParaRPr lang="es-CO" dirty="0"/>
+          </a:p>
+          <a:p>
+            <a:pPr lvl="0"/>
+            <a:r>
+              <a:rPr lang="es-CO" dirty="0"/>
+              <a:t>Los monolitos se escalan mas fácilmente que los </a:t>
+            </a:r>
+            <a:r>
+              <a:rPr lang="es-CO" dirty="0" err="1"/>
+              <a:t>microservicios</a:t>
+            </a:r>
+            <a:r>
+              <a:rPr lang="es-CO" dirty="0"/>
+              <a:t>.</a:t>
+            </a:r>
+          </a:p>
+          <a:p>
+            <a:pPr lvl="1"/>
+            <a:r>
+              <a:rPr lang="es-CO" b="1" dirty="0"/>
+              <a:t>R/ </a:t>
+            </a:r>
+            <a:r>
+              <a:rPr lang="es-CO" b="1" dirty="0">
+                <a:solidFill>
+                  <a:srgbClr val="FF0000"/>
+                </a:solidFill>
+              </a:rPr>
+              <a:t>Falso</a:t>
+            </a:r>
+            <a:r>
+              <a:rPr lang="es-CO" b="1" dirty="0"/>
+              <a:t>: </a:t>
+            </a:r>
+            <a:r>
+              <a:rPr lang="es-CO" dirty="0"/>
+              <a:t>Aunque escalar un monolito es solo instanciar una nueva </a:t>
+            </a:r>
+            <a:r>
+              <a:rPr lang="es-CO" dirty="0" err="1"/>
+              <a:t>maquna</a:t>
+            </a:r>
+            <a:r>
+              <a:rPr lang="es-CO" dirty="0"/>
+              <a:t>, se debe garantizar que el nuevo usuario </a:t>
+            </a:r>
+            <a:r>
+              <a:rPr lang="es-CO" dirty="0" err="1"/>
+              <a:t>continue</a:t>
+            </a:r>
+            <a:r>
+              <a:rPr lang="es-CO" dirty="0"/>
+              <a:t> su sesión en la nueva instancia.</a:t>
+            </a:r>
+          </a:p>
+          <a:p>
+            <a:pPr lvl="1"/>
+            <a:endParaRPr lang="es-CO" dirty="0"/>
+          </a:p>
+          <a:p>
+            <a:pPr lvl="0"/>
+            <a:r>
+              <a:rPr lang="es-CO" dirty="0"/>
+              <a:t>Los </a:t>
+            </a:r>
+            <a:r>
+              <a:rPr lang="es-CO" dirty="0" err="1"/>
+              <a:t>microservicios</a:t>
+            </a:r>
+            <a:r>
+              <a:rPr lang="es-CO" dirty="0"/>
+              <a:t> hacen mas complejo la pruebas funcionales de la </a:t>
+            </a:r>
+            <a:r>
+              <a:rPr lang="es-CO" dirty="0" err="1"/>
+              <a:t>apliación</a:t>
+            </a:r>
+            <a:r>
+              <a:rPr lang="es-CO" dirty="0"/>
+              <a:t>.</a:t>
+            </a:r>
+          </a:p>
+          <a:p>
+            <a:pPr lvl="1"/>
+            <a:r>
+              <a:rPr lang="es-CO" b="1" dirty="0"/>
+              <a:t>R/ </a:t>
+            </a:r>
+            <a:r>
+              <a:rPr lang="es-CO" b="1" dirty="0">
+                <a:solidFill>
+                  <a:srgbClr val="00B050"/>
+                </a:solidFill>
+              </a:rPr>
+              <a:t>Verdadero</a:t>
+            </a:r>
+            <a:r>
+              <a:rPr lang="es-CO" b="1" dirty="0"/>
+              <a:t>: E</a:t>
+            </a:r>
+            <a:r>
+              <a:rPr lang="es-CO" dirty="0"/>
+              <a:t>l </a:t>
+            </a:r>
+            <a:r>
+              <a:rPr lang="es-CO" dirty="0" err="1"/>
+              <a:t>tner</a:t>
+            </a:r>
+            <a:r>
+              <a:rPr lang="es-CO" dirty="0"/>
+              <a:t> </a:t>
+            </a:r>
+            <a:r>
+              <a:rPr lang="es-CO" dirty="0" err="1"/>
+              <a:t>multiples</a:t>
+            </a:r>
+            <a:r>
+              <a:rPr lang="es-CO" dirty="0"/>
+              <a:t> </a:t>
+            </a:r>
+            <a:r>
+              <a:rPr lang="es-CO" dirty="0" err="1"/>
+              <a:t>microservicios</a:t>
+            </a:r>
+            <a:r>
+              <a:rPr lang="es-CO" dirty="0"/>
+              <a:t> que </a:t>
+            </a:r>
+            <a:r>
+              <a:rPr lang="es-CO" dirty="0" err="1"/>
+              <a:t>componene</a:t>
+            </a:r>
+            <a:r>
+              <a:rPr lang="es-CO" dirty="0"/>
+              <a:t> toda la aplicación, realizar una prueba funcional que involucre muchos </a:t>
+            </a:r>
+            <a:r>
+              <a:rPr lang="es-CO" dirty="0" err="1"/>
+              <a:t>microservicios</a:t>
+            </a:r>
+            <a:r>
+              <a:rPr lang="es-CO" dirty="0"/>
+              <a:t> puede ser mas complejo que hacerlo en </a:t>
+            </a:r>
+            <a:r>
+              <a:rPr lang="es-CO" dirty="0" err="1"/>
+              <a:t>unmonolito</a:t>
+            </a:r>
+            <a:r>
+              <a:rPr lang="es-CO" dirty="0"/>
+              <a:t>.</a:t>
+            </a:r>
+          </a:p>
+          <a:p>
+            <a:pPr lvl="1"/>
+            <a:endParaRPr lang="es-CO" dirty="0"/>
+          </a:p>
+          <a:p>
+            <a:pPr lvl="0"/>
+            <a:r>
+              <a:rPr lang="es-CO" dirty="0"/>
+              <a:t>El </a:t>
+            </a:r>
+            <a:r>
+              <a:rPr lang="es-CO" dirty="0" err="1"/>
+              <a:t>versionamiento</a:t>
+            </a:r>
+            <a:r>
+              <a:rPr lang="es-CO" dirty="0"/>
+              <a:t> de </a:t>
+            </a:r>
+            <a:r>
+              <a:rPr lang="es-CO" dirty="0" err="1"/>
+              <a:t>microservicios</a:t>
+            </a:r>
+            <a:r>
+              <a:rPr lang="es-CO" dirty="0"/>
+              <a:t> es más sencillo que el de una aplicación </a:t>
+            </a:r>
+            <a:r>
+              <a:rPr lang="es-CO" dirty="0" err="1"/>
+              <a:t>monolitica</a:t>
+            </a:r>
+            <a:endParaRPr lang="es-CO" dirty="0"/>
+          </a:p>
+          <a:p>
+            <a:pPr lvl="1"/>
+            <a:r>
+              <a:rPr lang="es-CO" b="1" dirty="0"/>
+              <a:t>R/ </a:t>
+            </a:r>
+            <a:r>
+              <a:rPr lang="es-CO" b="1" dirty="0">
+                <a:solidFill>
+                  <a:srgbClr val="FF0000"/>
+                </a:solidFill>
+              </a:rPr>
+              <a:t>Falso</a:t>
+            </a:r>
+            <a:r>
+              <a:rPr lang="es-CO" b="1" dirty="0"/>
+              <a:t>: </a:t>
+            </a:r>
+            <a:r>
+              <a:rPr lang="es-CO" dirty="0"/>
+              <a:t>El uso de </a:t>
+            </a:r>
+            <a:r>
+              <a:rPr lang="es-CO" dirty="0" err="1"/>
+              <a:t>microservicios</a:t>
+            </a:r>
+            <a:r>
+              <a:rPr lang="es-CO" dirty="0"/>
+              <a:t>, puede hacer mas complejo el </a:t>
+            </a:r>
+            <a:r>
+              <a:rPr lang="es-CO" dirty="0" err="1"/>
+              <a:t>versionamiento</a:t>
+            </a:r>
+            <a:r>
+              <a:rPr lang="es-CO" dirty="0"/>
+              <a:t> de toda la aplicación pues cada servicio cambia o se versiona de manera independiente y en algunos casos sin afectar la funcionalidad de la aplicación general.</a:t>
+            </a:r>
+          </a:p>
+          <a:p>
+            <a:pPr lvl="1"/>
+            <a:endParaRPr lang="es-CO" dirty="0"/>
+          </a:p>
+          <a:p>
+            <a:pPr lvl="0"/>
+            <a:r>
+              <a:rPr lang="es-CO" dirty="0"/>
               <a:t>Pasarse a </a:t>
             </a:r>
             <a:r>
-              <a:rPr lang="es-CO" dirty="0" err="1" smtClean="0"/>
+              <a:rPr lang="es-CO" dirty="0" err="1"/>
               <a:t>microservicios</a:t>
             </a:r>
             <a:r>
-              <a:rPr lang="es-CO" dirty="0" smtClean="0"/>
+              <a:rPr lang="es-CO" dirty="0"/>
               <a:t> es tan sencillo como encender un </a:t>
             </a:r>
             <a:r>
-              <a:rPr lang="es-CO" dirty="0" err="1" smtClean="0"/>
+              <a:rPr lang="es-CO" dirty="0" err="1"/>
               <a:t>bombilo</a:t>
             </a:r>
-            <a:endParaRPr lang="es-CO" dirty="0" smtClean="0"/>
+            <a:endParaRPr lang="es-CO" dirty="0"/>
           </a:p>
           <a:p>
             <a:pPr lvl="1"/>
             <a:r>
-              <a:rPr lang="es-CO" b="1" dirty="0" smtClean="0"/>
+              <a:rPr lang="es-CO" b="1" dirty="0"/>
               <a:t>R/ </a:t>
             </a:r>
             <a:r>
-              <a:rPr lang="es-CO" b="1" dirty="0" smtClean="0">
+              <a:rPr lang="es-CO" b="1" dirty="0">
                 <a:solidFill>
                   <a:srgbClr val="FF0000"/>
                 </a:solidFill>
@@ -7876,14 +7507,13 @@
               <a:t>Falso</a:t>
             </a:r>
             <a:r>
-              <a:rPr lang="es-CO" b="1" dirty="0" smtClean="0"/>
+              <a:rPr lang="es-CO" b="1" dirty="0"/>
               <a:t>: </a:t>
             </a:r>
             <a:r>
-              <a:rPr lang="es-CO" dirty="0" smtClean="0"/>
+              <a:rPr lang="es-CO" dirty="0"/>
               <a:t>en algunos casos puede ser mas costoso que desarrollar una nueva aplicación.</a:t>
             </a:r>
-            <a:endParaRPr lang="es-CO" dirty="0"/>
           </a:p>
         </p:txBody>
       </p:sp>
@@ -8547,10 +8177,9 @@
           <a:p>
             <a:pPr algn="ctr"/>
             <a:r>
-              <a:rPr lang="es-CO" dirty="0" smtClean="0"/>
+              <a:rPr lang="es-CO" dirty="0"/>
               <a:t>Preguntas?</a:t>
             </a:r>
-            <a:endParaRPr lang="es-CO" dirty="0"/>
           </a:p>
         </p:txBody>
       </p:sp>
@@ -8585,13 +8214,6 @@
   <p:clrMapOvr>
     <a:masterClrMapping/>
   </p:clrMapOvr>
-  <p:timing>
-    <p:tnLst>
-      <p:par>
-        <p:cTn id="1" dur="indefinite" restart="never" nodeType="tmRoot"/>
-      </p:par>
-    </p:tnLst>
-  </p:timing>
 </p:sld>
 </file>
 
@@ -8650,7 +8272,7 @@
           <a:p>
             <a:pPr algn="ctr"/>
             <a:r>
-              <a:rPr lang="en-US" sz="6600" b="1" cap="all" dirty="0" smtClean="0">
+              <a:rPr lang="en-US" sz="6600" b="1" cap="all" dirty="0">
                 <a:ln w="0"/>
                 <a:solidFill>
                   <a:srgbClr val="0066CC">
@@ -8664,18 +8286,6 @@
               </a:rPr>
               <a:t>Gracias!!!</a:t>
             </a:r>
-            <a:endParaRPr lang="en-US" sz="6600" b="1" cap="all" dirty="0">
-              <a:ln w="0"/>
-              <a:solidFill>
-                <a:srgbClr val="0066CC">
-                  <a:alpha val="74000"/>
-                </a:srgbClr>
-              </a:solidFill>
-              <a:effectLst>
-                <a:reflection blurRad="12700" stA="50000" endPos="50000" dist="5000" dir="5400000" sy="-100000" rotWithShape="0"/>
-              </a:effectLst>
-              <a:latin typeface="Berlin Sans FB Demi" pitchFamily="34" charset="0"/>
-            </a:endParaRPr>
           </a:p>
         </p:txBody>
       </p:sp>
@@ -8684,13 +8294,6 @@
   <p:clrMapOvr>
     <a:masterClrMapping/>
   </p:clrMapOvr>
-  <p:timing>
-    <p:tnLst>
-      <p:par>
-        <p:cTn id="1" dur="indefinite" restart="never" nodeType="tmRoot"/>
-      </p:par>
-    </p:tnLst>
-  </p:timing>
 </p:sld>
 </file>
 
@@ -8727,10 +8330,9 @@
           <a:lstStyle/>
           <a:p>
             <a:r>
-              <a:rPr lang="es-CO" dirty="0" smtClean="0"/>
+              <a:rPr lang="es-CO" dirty="0"/>
               <a:t>Evolución de la Arquitectura</a:t>
             </a:r>
-            <a:endParaRPr lang="es-CO" dirty="0"/>
           </a:p>
         </p:txBody>
       </p:sp>
@@ -8833,23 +8435,23 @@
             <a:p>
               <a:pPr algn="ctr"/>
               <a:r>
-                <a:rPr lang="es-CO" sz="2000" dirty="0" err="1" smtClean="0"/>
+                <a:rPr lang="es-CO" sz="2000" dirty="0" err="1"/>
                 <a:t>Architecture</a:t>
               </a:r>
-              <a:endParaRPr lang="es-CO" sz="2000" dirty="0" smtClean="0"/>
+              <a:endParaRPr lang="es-CO" sz="2000" dirty="0"/>
             </a:p>
             <a:p>
               <a:pPr algn="ctr"/>
               <a:r>
-                <a:rPr lang="es-CO" sz="1600" dirty="0" smtClean="0"/>
+                <a:rPr lang="es-CO" sz="1600" dirty="0"/>
                 <a:t>(</a:t>
               </a:r>
               <a:r>
-                <a:rPr lang="es-CO" sz="1600" dirty="0" err="1" smtClean="0"/>
+                <a:rPr lang="es-CO" sz="1600" dirty="0" err="1"/>
                 <a:t>Copy</a:t>
               </a:r>
               <a:r>
-                <a:rPr lang="es-CO" sz="1600" dirty="0" smtClean="0"/>
+                <a:rPr lang="es-CO" sz="1600" dirty="0"/>
                 <a:t> &amp; Paste)</a:t>
               </a:r>
               <a:endParaRPr lang="es-CO" sz="1200" dirty="0"/>
@@ -8930,47 +8532,45 @@
             <a:p>
               <a:pPr algn="ctr"/>
               <a:r>
-                <a:rPr lang="es-CO" sz="4000" b="1" dirty="0" smtClean="0"/>
+                <a:rPr lang="es-CO" sz="4000" b="1" dirty="0"/>
                 <a:t>2000’s</a:t>
               </a:r>
               <a:r>
-                <a:rPr lang="es-CO" sz="4400" b="1" dirty="0" smtClean="0"/>
+                <a:rPr lang="es-CO" sz="4400" b="1" dirty="0"/>
                 <a:t> </a:t>
               </a:r>
-              <a:endParaRPr lang="es-CO" sz="4400" b="1" dirty="0"/>
             </a:p>
             <a:p>
               <a:pPr algn="ctr"/>
               <a:r>
-                <a:rPr lang="es-CO" sz="2000" dirty="0" err="1" smtClean="0"/>
+                <a:rPr lang="es-CO" sz="2000" dirty="0" err="1"/>
                 <a:t>Lasagna-Oriented</a:t>
               </a:r>
               <a:r>
-                <a:rPr lang="es-CO" sz="2000" dirty="0" smtClean="0"/>
+                <a:rPr lang="es-CO" sz="2000" dirty="0"/>
                 <a:t> </a:t>
+              </a:r>
+            </a:p>
+            <a:p>
+              <a:pPr algn="ctr"/>
+              <a:r>
+                <a:rPr lang="es-CO" sz="2000" dirty="0" err="1"/>
+                <a:t>Architecture</a:t>
               </a:r>
               <a:endParaRPr lang="es-CO" sz="2000" dirty="0"/>
             </a:p>
             <a:p>
               <a:pPr algn="ctr"/>
               <a:r>
-                <a:rPr lang="es-CO" sz="2000" dirty="0" err="1" smtClean="0"/>
-                <a:t>Architecture</a:t>
-              </a:r>
-              <a:endParaRPr lang="es-CO" sz="2000" dirty="0" smtClean="0"/>
-            </a:p>
-            <a:p>
-              <a:pPr algn="ctr"/>
-              <a:r>
-                <a:rPr lang="es-CO" sz="1600" dirty="0" smtClean="0"/>
+                <a:rPr lang="es-CO" sz="1600" dirty="0"/>
                 <a:t>(</a:t>
               </a:r>
               <a:r>
-                <a:rPr lang="es-CO" sz="1600" dirty="0" err="1" smtClean="0"/>
+                <a:rPr lang="es-CO" sz="1600" dirty="0" err="1"/>
                 <a:t>Layers</a:t>
               </a:r>
               <a:r>
-                <a:rPr lang="es-CO" sz="1600" dirty="0" smtClean="0"/>
+                <a:rPr lang="es-CO" sz="1600" dirty="0"/>
                 <a:t>)</a:t>
               </a:r>
               <a:endParaRPr lang="es-CO" sz="1200" dirty="0"/>
@@ -9051,51 +8651,49 @@
             <a:p>
               <a:pPr algn="ctr"/>
               <a:r>
-                <a:rPr lang="es-CO" sz="4000" b="1" dirty="0" smtClean="0"/>
+                <a:rPr lang="es-CO" sz="4000" b="1" dirty="0"/>
                 <a:t>2010’s</a:t>
               </a:r>
               <a:r>
-                <a:rPr lang="es-CO" sz="4400" b="1" dirty="0" smtClean="0"/>
+                <a:rPr lang="es-CO" sz="4400" b="1" dirty="0"/>
                 <a:t> </a:t>
               </a:r>
-              <a:endParaRPr lang="es-CO" sz="4400" b="1" dirty="0"/>
             </a:p>
             <a:p>
               <a:pPr algn="ctr"/>
               <a:r>
-                <a:rPr lang="es-CO" sz="2000" dirty="0" smtClean="0"/>
+                <a:rPr lang="es-CO" sz="2000" dirty="0"/>
                 <a:t>Ravioli-</a:t>
               </a:r>
               <a:r>
-                <a:rPr lang="es-CO" sz="2000" dirty="0" err="1" smtClean="0"/>
+                <a:rPr lang="es-CO" sz="2000" dirty="0" err="1"/>
                 <a:t>Oriented</a:t>
               </a:r>
               <a:r>
-                <a:rPr lang="es-CO" sz="2000" dirty="0" smtClean="0"/>
+                <a:rPr lang="es-CO" sz="2000" dirty="0"/>
                 <a:t> </a:t>
+              </a:r>
+            </a:p>
+            <a:p>
+              <a:pPr algn="ctr"/>
+              <a:r>
+                <a:rPr lang="es-CO" sz="2000" dirty="0" err="1"/>
+                <a:t>Architecture</a:t>
               </a:r>
               <a:endParaRPr lang="es-CO" sz="2000" dirty="0"/>
             </a:p>
             <a:p>
               <a:pPr algn="ctr"/>
               <a:r>
-                <a:rPr lang="es-CO" sz="2000" dirty="0" err="1" smtClean="0"/>
-                <a:t>Architecture</a:t>
-              </a:r>
-              <a:endParaRPr lang="es-CO" sz="2000" dirty="0" smtClean="0"/>
-            </a:p>
-            <a:p>
-              <a:pPr algn="ctr"/>
-              <a:r>
-                <a:rPr lang="es-CO" sz="1600" dirty="0" smtClean="0"/>
+                <a:rPr lang="es-CO" sz="1600" dirty="0"/>
                 <a:t>(</a:t>
               </a:r>
               <a:r>
-                <a:rPr lang="es-CO" sz="1600" dirty="0" err="1" smtClean="0"/>
+                <a:rPr lang="es-CO" sz="1600" dirty="0" err="1"/>
                 <a:t>Microservices</a:t>
               </a:r>
               <a:r>
-                <a:rPr lang="es-CO" sz="1600" dirty="0" smtClean="0"/>
+                <a:rPr lang="es-CO" sz="1600" dirty="0"/>
                 <a:t>)</a:t>
               </a:r>
               <a:endParaRPr lang="es-CO" sz="1200" dirty="0"/>
@@ -9314,27 +8912,27 @@
           <a:lstStyle/>
           <a:p>
             <a:r>
-              <a:rPr lang="en-US" dirty="0" err="1" smtClean="0"/>
+              <a:rPr lang="en-US" dirty="0" err="1"/>
               <a:t>Qué</a:t>
             </a:r>
             <a:r>
-              <a:rPr lang="en-US" dirty="0" smtClean="0"/>
+              <a:rPr lang="en-US" dirty="0"/>
               <a:t> </a:t>
             </a:r>
             <a:r>
-              <a:rPr lang="en-US" dirty="0" err="1" smtClean="0"/>
+              <a:rPr lang="en-US" dirty="0" err="1"/>
               <a:t>es</a:t>
             </a:r>
             <a:r>
-              <a:rPr lang="en-US" dirty="0" smtClean="0"/>
+              <a:rPr lang="en-US" dirty="0"/>
               <a:t> un </a:t>
             </a:r>
             <a:r>
-              <a:rPr lang="en-US" dirty="0" err="1" smtClean="0"/>
+              <a:rPr lang="en-US" dirty="0" err="1"/>
               <a:t>Microservicio</a:t>
             </a:r>
             <a:r>
-              <a:rPr lang="en-US" dirty="0" smtClean="0"/>
+              <a:rPr lang="en-US" dirty="0"/>
               <a:t>?</a:t>
             </a:r>
             <a:endParaRPr lang="es-CO" dirty="0"/>
@@ -9483,7 +9081,6 @@
               <a:rPr lang="es-CO" dirty="0"/>
               <a:t>bien definidas. </a:t>
             </a:r>
-            <a:endParaRPr lang="es-CO" dirty="0" smtClean="0"/>
           </a:p>
         </p:txBody>
       </p:sp>
@@ -9584,11 +9181,11 @@
           <a:lstStyle/>
           <a:p>
             <a:r>
-              <a:rPr lang="en-US" dirty="0" err="1" smtClean="0"/>
+              <a:rPr lang="en-US" dirty="0" err="1"/>
               <a:t>Microservicios</a:t>
             </a:r>
             <a:r>
-              <a:rPr lang="en-US" dirty="0" smtClean="0"/>
+              <a:rPr lang="en-US" dirty="0"/>
               <a:t> - </a:t>
             </a:r>
             <a:r>
@@ -9621,28 +9218,27 @@
           <a:lstStyle/>
           <a:p>
             <a:r>
-              <a:rPr lang="es-CO" dirty="0" smtClean="0"/>
+              <a:rPr lang="es-CO" dirty="0"/>
               <a:t>Pequeños y Especializados en el negocio</a:t>
             </a:r>
           </a:p>
           <a:p>
             <a:r>
-              <a:rPr lang="es-CO" dirty="0" smtClean="0"/>
+              <a:rPr lang="es-CO" dirty="0"/>
               <a:t>Autónomos </a:t>
             </a:r>
           </a:p>
           <a:p>
             <a:r>
-              <a:rPr lang="es-CO" dirty="0" smtClean="0"/>
+              <a:rPr lang="es-CO" dirty="0"/>
               <a:t>Despliegue Independiente</a:t>
             </a:r>
           </a:p>
           <a:p>
             <a:r>
-              <a:rPr lang="es-CO" dirty="0" smtClean="0"/>
+              <a:rPr lang="es-CO" dirty="0"/>
               <a:t>Alto nivel de desacoplamiento</a:t>
             </a:r>
-            <a:endParaRPr lang="es-CO" dirty="0"/>
           </a:p>
           <a:p>
             <a:endParaRPr lang="es-CO" dirty="0"/>
@@ -9695,15 +9291,15 @@
           <a:lstStyle/>
           <a:p>
             <a:r>
-              <a:rPr lang="en-US" dirty="0" err="1" smtClean="0"/>
+              <a:rPr lang="en-US" dirty="0" err="1"/>
               <a:t>Monolito</a:t>
             </a:r>
             <a:r>
-              <a:rPr lang="en-US" dirty="0" smtClean="0"/>
+              <a:rPr lang="en-US" dirty="0"/>
               <a:t> vs </a:t>
             </a:r>
             <a:r>
-              <a:rPr lang="en-US" dirty="0" err="1" smtClean="0"/>
+              <a:rPr lang="en-US" dirty="0" err="1"/>
               <a:t>Microservicios</a:t>
             </a:r>
             <a:endParaRPr lang="es-CO" dirty="0"/>
@@ -9809,10 +9405,9 @@
           <a:lstStyle/>
           <a:p>
             <a:r>
-              <a:rPr lang="es-CO" dirty="0" smtClean="0"/>
+              <a:rPr lang="es-CO" dirty="0"/>
               <a:t>Arquitectura Monolítica</a:t>
             </a:r>
-            <a:endParaRPr lang="es-CO" dirty="0"/>
           </a:p>
         </p:txBody>
       </p:sp>
@@ -9837,10 +9432,9 @@
           <a:lstStyle/>
           <a:p>
             <a:r>
-              <a:rPr lang="es-CO" dirty="0" smtClean="0"/>
+              <a:rPr lang="es-CO" dirty="0"/>
               <a:t>Agrupa todo lo relacionado con el sistema en un mismo proyecto separado la lógica  por paquetes o capas que interactúan entre si</a:t>
             </a:r>
-            <a:endParaRPr lang="es-CO" dirty="0"/>
           </a:p>
         </p:txBody>
       </p:sp>
@@ -9889,13 +9483,6 @@
   <p:clrMapOvr>
     <a:masterClrMapping/>
   </p:clrMapOvr>
-  <p:timing>
-    <p:tnLst>
-      <p:par>
-        <p:cTn id="1" dur="indefinite" restart="never" nodeType="tmRoot"/>
-      </p:par>
-    </p:tnLst>
-  </p:timing>
 </p:sld>
 </file>
 
@@ -9964,7 +9551,7 @@
               <a:buNone/>
             </a:pPr>
             <a:r>
-              <a:rPr lang="es-CO" b="1" dirty="0" smtClean="0">
+              <a:rPr lang="es-CO" b="1" dirty="0">
                 <a:solidFill>
                   <a:srgbClr val="00B050"/>
                 </a:solidFill>
@@ -9974,43 +9561,43 @@
           </a:p>
           <a:p>
             <a:r>
-              <a:rPr lang="es-CO" sz="2400" dirty="0" smtClean="0"/>
+              <a:rPr lang="es-CO" sz="2400" dirty="0"/>
               <a:t>Fácil de desarrollar</a:t>
             </a:r>
           </a:p>
           <a:p>
             <a:r>
-              <a:rPr lang="es-CO" sz="2400" dirty="0" smtClean="0"/>
+              <a:rPr lang="es-CO" sz="2400" dirty="0"/>
               <a:t>Fácil despliegue e instalación</a:t>
             </a:r>
           </a:p>
           <a:p>
             <a:r>
-              <a:rPr lang="es-CO" sz="2400" dirty="0" smtClean="0"/>
+              <a:rPr lang="es-CO" sz="2400" dirty="0"/>
               <a:t>Sencilla de Escalar</a:t>
             </a:r>
           </a:p>
           <a:p>
             <a:r>
-              <a:rPr lang="es-CO" sz="2400" dirty="0" smtClean="0"/>
+              <a:rPr lang="es-CO" sz="2400" dirty="0"/>
               <a:t>Fácil de Monitorear</a:t>
             </a:r>
           </a:p>
           <a:p>
             <a:r>
-              <a:rPr lang="es-CO" sz="2400" dirty="0" smtClean="0"/>
+              <a:rPr lang="es-CO" sz="2400" dirty="0"/>
               <a:t>Testeo funcional más fácil</a:t>
             </a:r>
           </a:p>
           <a:p>
             <a:r>
-              <a:rPr lang="es-CO" sz="2400" dirty="0" smtClean="0"/>
+              <a:rPr lang="es-CO" sz="2400" dirty="0"/>
               <a:t>Bajo costo de desarrollo</a:t>
             </a:r>
           </a:p>
           <a:p>
             <a:r>
-              <a:rPr lang="es-CO" sz="2400" dirty="0" smtClean="0"/>
+              <a:rPr lang="es-CO" sz="2400" dirty="0"/>
               <a:t>Tecnología única</a:t>
             </a:r>
           </a:p>
@@ -10195,7 +9782,7 @@
               <a:buNone/>
             </a:pPr>
             <a:r>
-              <a:rPr lang="es-CO" b="1" dirty="0" smtClean="0">
+              <a:rPr lang="es-CO" b="1" dirty="0">
                 <a:solidFill>
                   <a:srgbClr val="C00000"/>
                 </a:solidFill>
@@ -10205,25 +9792,25 @@
           </a:p>
           <a:p>
             <a:r>
-              <a:rPr lang="es-CO" sz="2400" dirty="0" smtClean="0"/>
+              <a:rPr lang="es-CO" sz="2400" dirty="0"/>
               <a:t>Tamaño y complejidad limitadas</a:t>
             </a:r>
           </a:p>
           <a:p>
             <a:r>
-              <a:rPr lang="es-CO" sz="2400" dirty="0" smtClean="0"/>
+              <a:rPr lang="es-CO" sz="2400" dirty="0"/>
               <a:t>Arranque lento</a:t>
             </a:r>
           </a:p>
           <a:p>
             <a:r>
-              <a:rPr lang="es-CO" sz="2400" dirty="0" smtClean="0"/>
+              <a:rPr lang="es-CO" sz="2400" dirty="0"/>
               <a:t>Fiabilidad de la aplicación</a:t>
             </a:r>
           </a:p>
           <a:p>
             <a:r>
-              <a:rPr lang="es-CO" sz="2400" dirty="0" smtClean="0"/>
+              <a:rPr lang="es-CO" sz="2400" dirty="0"/>
               <a:t>Escalabilidad modular deficiente</a:t>
             </a:r>
           </a:p>
@@ -10239,13 +9826,6 @@
   <p:clrMapOvr>
     <a:masterClrMapping/>
   </p:clrMapOvr>
-  <p:timing>
-    <p:tnLst>
-      <p:par>
-        <p:cTn id="1" dur="indefinite" restart="never" nodeType="tmRoot"/>
-      </p:par>
-    </p:tnLst>
-  </p:timing>
 </p:sld>
 </file>
 
@@ -10282,10 +9862,9 @@
           <a:lstStyle/>
           <a:p>
             <a:r>
-              <a:rPr lang="es-CO" dirty="0" smtClean="0"/>
+              <a:rPr lang="es-CO" dirty="0"/>
               <a:t>Arquitectura de Micro-Servicios</a:t>
             </a:r>
-            <a:endParaRPr lang="es-CO" dirty="0"/>
           </a:p>
         </p:txBody>
       </p:sp>
@@ -10311,18 +9890,17 @@
           <a:p>
             <a:pPr algn="just"/>
             <a:r>
-              <a:rPr lang="es-CO" dirty="0" smtClean="0"/>
+              <a:rPr lang="es-CO" dirty="0"/>
               <a:t>Es una aplicación distribuida, donde cada componente debe ser independiente de los demás y comunicarse de manera liviana (API </a:t>
             </a:r>
             <a:r>
-              <a:rPr lang="es-CO" dirty="0" err="1" smtClean="0"/>
+              <a:rPr lang="es-CO" dirty="0" err="1"/>
               <a:t>Rest</a:t>
             </a:r>
             <a:r>
-              <a:rPr lang="es-CO" dirty="0" smtClean="0"/>
+              <a:rPr lang="es-CO" dirty="0"/>
               <a:t>)</a:t>
             </a:r>
-            <a:endParaRPr lang="es-CO" dirty="0"/>
           </a:p>
         </p:txBody>
       </p:sp>
@@ -10335,7 +9913,7 @@
           <p:nvPr/>
         </p:nvPicPr>
         <p:blipFill>
-          <a:blip r:embed="rId2">
+          <a:blip r:embed="rId4">
             <a:clrChange>
               <a:clrFrom>
                 <a:srgbClr val="FFFFFF"/>
@@ -10361,6 +9939,44 @@
           </a:prstGeom>
         </p:spPr>
       </p:pic>
+      <p:pic>
+        <p:nvPicPr>
+          <p:cNvPr id="4" name="clase">
+            <a:hlinkClick r:id="" action="ppaction://media"/>
+            <a:extLst>
+              <a:ext uri="{FF2B5EF4-FFF2-40B4-BE49-F238E27FC236}">
+                <a16:creationId xmlns:a16="http://schemas.microsoft.com/office/drawing/2014/main" id="{F9811006-3949-3F8F-2936-DE44A7FFB8F3}"/>
+              </a:ext>
+            </a:extLst>
+          </p:cNvPr>
+          <p:cNvPicPr>
+            <a:picLocks noChangeAspect="1"/>
+          </p:cNvPicPr>
+          <p:nvPr>
+            <a:audioFile r:link="rId2"/>
+            <p:extLst>
+              <p:ext uri="{DAA4B4D4-6D71-4841-9C94-3DE7FCFB9230}">
+                <p14:media xmlns:p14="http://schemas.microsoft.com/office/powerpoint/2010/main" r:embed="rId1"/>
+              </p:ext>
+            </p:extLst>
+          </p:nvPr>
+        </p:nvPicPr>
+        <p:blipFill>
+          <a:blip r:embed="rId5"/>
+          <a:stretch>
+            <a:fillRect/>
+          </a:stretch>
+        </p:blipFill>
+        <p:spPr>
+          <a:xfrm>
+            <a:off x="8070349" y="2636912"/>
+            <a:ext cx="609600" cy="609600"/>
+          </a:xfrm>
+          <a:prstGeom prst="rect">
+            <a:avLst/>
+          </a:prstGeom>
+        </p:spPr>
+      </p:pic>
     </p:spTree>
     <p:extLst>
       <p:ext uri="{BB962C8B-B14F-4D97-AF65-F5344CB8AC3E}">
@@ -10374,7 +9990,84 @@
   <p:timing>
     <p:tnLst>
       <p:par>
-        <p:cTn id="1" dur="indefinite" restart="never" nodeType="tmRoot"/>
+        <p:cTn id="1" dur="indefinite" restart="never" nodeType="tmRoot">
+          <p:childTnLst>
+            <p:seq concurrent="1" nextAc="seek">
+              <p:cTn id="2" dur="indefinite" nodeType="mainSeq">
+                <p:childTnLst>
+                  <p:par>
+                    <p:cTn id="3" fill="hold">
+                      <p:stCondLst>
+                        <p:cond delay="indefinite"/>
+                      </p:stCondLst>
+                      <p:childTnLst>
+                        <p:par>
+                          <p:cTn id="4" fill="hold">
+                            <p:stCondLst>
+                              <p:cond delay="0"/>
+                            </p:stCondLst>
+                            <p:childTnLst>
+                              <p:par>
+                                <p:cTn id="5" presetID="1" presetClass="mediacall" presetSubtype="0" fill="hold" nodeType="clickEffect">
+                                  <p:stCondLst>
+                                    <p:cond delay="0"/>
+                                  </p:stCondLst>
+                                  <p:childTnLst>
+                                    <p:cmd type="call" cmd="playFrom(0.0)">
+                                      <p:cBhvr>
+                                        <p:cTn id="6" dur="96118" fill="hold"/>
+                                        <p:tgtEl>
+                                          <p:spTgt spid="4"/>
+                                        </p:tgtEl>
+                                      </p:cBhvr>
+                                    </p:cmd>
+                                  </p:childTnLst>
+                                </p:cTn>
+                              </p:par>
+                            </p:childTnLst>
+                          </p:cTn>
+                        </p:par>
+                      </p:childTnLst>
+                    </p:cTn>
+                  </p:par>
+                </p:childTnLst>
+              </p:cTn>
+              <p:prevCondLst>
+                <p:cond evt="onPrev" delay="0">
+                  <p:tgtEl>
+                    <p:sldTgt/>
+                  </p:tgtEl>
+                </p:cond>
+              </p:prevCondLst>
+              <p:nextCondLst>
+                <p:cond evt="onNext" delay="0">
+                  <p:tgtEl>
+                    <p:sldTgt/>
+                  </p:tgtEl>
+                </p:cond>
+              </p:nextCondLst>
+            </p:seq>
+            <p:audio>
+              <p:cMediaNode vol="80000">
+                <p:cTn id="7" fill="hold" display="0">
+                  <p:stCondLst>
+                    <p:cond delay="indefinite"/>
+                  </p:stCondLst>
+                  <p:endCondLst>
+                    <p:cond evt="onStopAudio" delay="0">
+                      <p:tgtEl>
+                        <p:sldTgt/>
+                      </p:tgtEl>
+                    </p:cond>
+                  </p:endCondLst>
+                </p:cTn>
+                <p:tgtEl>
+                  <p:spTgt spid="4"/>
+                </p:tgtEl>
+              </p:cMediaNode>
+            </p:audio>
+          </p:childTnLst>
+        </p:cTn>
       </p:par>
     </p:tnLst>
   </p:timing>
@@ -10446,7 +10139,7 @@
               <a:buNone/>
             </a:pPr>
             <a:r>
-              <a:rPr lang="es-CO" b="1" dirty="0" smtClean="0">
+              <a:rPr lang="es-CO" b="1" dirty="0">
                 <a:solidFill>
                   <a:srgbClr val="00B050"/>
                 </a:solidFill>
@@ -10456,49 +10149,39 @@
           </a:p>
           <a:p>
             <a:r>
-              <a:rPr lang="es-CO" sz="2400" dirty="0" smtClean="0"/>
+              <a:rPr lang="es-CO" sz="2400" dirty="0"/>
               <a:t>Fácil de desarrollar y mantener</a:t>
             </a:r>
           </a:p>
           <a:p>
             <a:r>
-              <a:rPr lang="es-CO" sz="2400" dirty="0" smtClean="0"/>
+              <a:rPr lang="es-CO" sz="2400" dirty="0"/>
               <a:t>Fácil despliegue e instalación</a:t>
             </a:r>
           </a:p>
           <a:p>
             <a:r>
-              <a:rPr lang="es-CO" sz="2400" dirty="0" smtClean="0"/>
+              <a:rPr lang="es-CO" sz="2400" dirty="0"/>
               <a:t>Múltiples lenguajes</a:t>
             </a:r>
           </a:p>
           <a:p>
             <a:r>
-              <a:rPr lang="es-CO" sz="2400" dirty="0" smtClean="0"/>
+              <a:rPr lang="es-CO" sz="2400" dirty="0"/>
               <a:t>Escalabilidad por Módulos</a:t>
             </a:r>
-            <a:endParaRPr lang="es-CO" sz="2400" dirty="0" smtClean="0"/>
-          </a:p>
-          <a:p>
-            <a:r>
-              <a:rPr lang="es-CO" sz="2400" dirty="0" smtClean="0"/>
+          </a:p>
+          <a:p>
+            <a:r>
+              <a:rPr lang="es-CO" sz="2400" dirty="0"/>
               <a:t>Entrega Continua.</a:t>
             </a:r>
           </a:p>
           <a:p>
             <a:r>
-              <a:rPr lang="es-CO" sz="2400" dirty="0" smtClean="0"/>
-              <a:t>Fácil </a:t>
-            </a:r>
-            <a:r>
-              <a:rPr lang="es-CO" sz="2400" dirty="0" smtClean="0"/>
-              <a:t>de </a:t>
-            </a:r>
-            <a:r>
-              <a:rPr lang="es-CO" sz="2400" dirty="0" smtClean="0"/>
-              <a:t>Probar por unidad</a:t>
-            </a:r>
-            <a:endParaRPr lang="es-CO" sz="2400" dirty="0" smtClean="0"/>
+              <a:rPr lang="es-CO" sz="2400" dirty="0"/>
+              <a:t>Fácil de Probar por unidad</a:t>
+            </a:r>
           </a:p>
         </p:txBody>
       </p:sp>
@@ -10681,7 +10364,7 @@
               <a:buNone/>
             </a:pPr>
             <a:r>
-              <a:rPr lang="es-CO" b="1" dirty="0" smtClean="0">
+              <a:rPr lang="es-CO" b="1" dirty="0">
                 <a:solidFill>
                   <a:srgbClr val="C00000"/>
                 </a:solidFill>
@@ -10691,49 +10374,45 @@
           </a:p>
           <a:p>
             <a:r>
-              <a:rPr lang="es-CO" sz="2400" dirty="0" smtClean="0"/>
+              <a:rPr lang="es-CO" sz="2400" dirty="0"/>
               <a:t>Complejidad de la arquitectura general</a:t>
             </a:r>
-            <a:endParaRPr lang="es-CO" sz="2400" dirty="0" smtClean="0"/>
-          </a:p>
-          <a:p>
-            <a:r>
-              <a:rPr lang="es-CO" sz="2400" dirty="0" err="1" smtClean="0"/>
+          </a:p>
+          <a:p>
+            <a:r>
+              <a:rPr lang="es-CO" sz="2400" dirty="0" err="1"/>
               <a:t>Multiples</a:t>
             </a:r>
             <a:r>
-              <a:rPr lang="es-CO" sz="2400" dirty="0" smtClean="0"/>
+              <a:rPr lang="es-CO" sz="2400" dirty="0"/>
               <a:t> bases de datos</a:t>
             </a:r>
-            <a:endParaRPr lang="es-CO" sz="2400" dirty="0" smtClean="0"/>
-          </a:p>
-          <a:p>
-            <a:r>
-              <a:rPr lang="es-CO" sz="2400" dirty="0" smtClean="0"/>
+          </a:p>
+          <a:p>
+            <a:r>
+              <a:rPr lang="es-CO" sz="2400" dirty="0"/>
               <a:t>Complejo de probar para la aplicación</a:t>
             </a:r>
-            <a:endParaRPr lang="es-CO" sz="2400" dirty="0" smtClean="0"/>
-          </a:p>
-          <a:p>
-            <a:r>
-              <a:rPr lang="es-CO" sz="2400" dirty="0" smtClean="0"/>
+          </a:p>
+          <a:p>
+            <a:r>
+              <a:rPr lang="es-CO" sz="2400" dirty="0"/>
               <a:t>Cambios Coordinados</a:t>
             </a:r>
           </a:p>
           <a:p>
             <a:r>
-              <a:rPr lang="es-CO" sz="2400" dirty="0" smtClean="0"/>
+              <a:rPr lang="es-CO" sz="2400" dirty="0"/>
               <a:t>Instalación y </a:t>
             </a:r>
             <a:r>
-              <a:rPr lang="es-CO" sz="2400" dirty="0" err="1" smtClean="0"/>
+              <a:rPr lang="es-CO" sz="2400" dirty="0" err="1"/>
               <a:t>versionamiento</a:t>
             </a:r>
             <a:r>
-              <a:rPr lang="es-CO" sz="2400" dirty="0" smtClean="0"/>
+              <a:rPr lang="es-CO" sz="2400" dirty="0"/>
               <a:t> mas complejos para la aplicación.</a:t>
             </a:r>
-            <a:endParaRPr lang="es-CO" sz="2400" dirty="0" smtClean="0"/>
           </a:p>
         </p:txBody>
       </p:sp>
@@ -10747,13 +10426,6 @@
   <p:clrMapOvr>
     <a:masterClrMapping/>
   </p:clrMapOvr>
-  <p:timing>
-    <p:tnLst>
-      <p:par>
-        <p:cTn id="1" dur="indefinite" restart="never" nodeType="tmRoot"/>
-      </p:par>
-    </p:tnLst>
-  </p:timing>
 </p:sld>
 </file>
 
